--- a/presentations/SPOT presentation 02.pptx
+++ b/presentations/SPOT presentation 02.pptx
@@ -5,13 +5,19 @@
     <p:sldMasterId id="2147483648" r:id="rId1"/>
   </p:sldMasterIdLst>
   <p:notesMasterIdLst>
-    <p:notesMasterId r:id="rId6"/>
+    <p:notesMasterId r:id="rId12"/>
   </p:notesMasterIdLst>
   <p:sldIdLst>
     <p:sldId id="256" r:id="rId2"/>
     <p:sldId id="257" r:id="rId3"/>
-    <p:sldId id="259" r:id="rId4"/>
-    <p:sldId id="258" r:id="rId5"/>
+    <p:sldId id="263" r:id="rId4"/>
+    <p:sldId id="262" r:id="rId5"/>
+    <p:sldId id="264" r:id="rId6"/>
+    <p:sldId id="266" r:id="rId7"/>
+    <p:sldId id="259" r:id="rId8"/>
+    <p:sldId id="265" r:id="rId9"/>
+    <p:sldId id="260" r:id="rId10"/>
+    <p:sldId id="258" r:id="rId11"/>
   </p:sldIdLst>
   <p:sldSz cx="12192000" cy="6858000"/>
   <p:notesSz cx="6858000" cy="9144000"/>
@@ -616,9 +622,10 @@
           <a:lstStyle/>
           <a:p>
             <a:r>
-              <a:rPr lang="de-DE"/>
-              <a:t>26.05.2025</a:t>
-            </a:r>
+              <a:rPr lang="en-US"/>
+              <a:t>05.06.2025</a:t>
+            </a:r>
+            <a:endParaRPr lang="de-DE"/>
           </a:p>
         </p:txBody>
       </p:sp>
@@ -819,9 +826,10 @@
           <a:lstStyle/>
           <a:p>
             <a:r>
-              <a:rPr lang="de-DE"/>
-              <a:t>26.05.2025</a:t>
-            </a:r>
+              <a:rPr lang="en-US"/>
+              <a:t>05.06.2025</a:t>
+            </a:r>
+            <a:endParaRPr lang="de-DE"/>
           </a:p>
         </p:txBody>
       </p:sp>
@@ -1032,9 +1040,10 @@
           <a:lstStyle/>
           <a:p>
             <a:r>
-              <a:rPr lang="de-DE"/>
-              <a:t>26.05.2025</a:t>
-            </a:r>
+              <a:rPr lang="en-US"/>
+              <a:t>05.06.2025</a:t>
+            </a:r>
+            <a:endParaRPr lang="de-DE"/>
           </a:p>
         </p:txBody>
       </p:sp>
@@ -1235,9 +1244,10 @@
           <a:lstStyle/>
           <a:p>
             <a:r>
-              <a:rPr lang="de-DE"/>
-              <a:t>26.05.2025</a:t>
-            </a:r>
+              <a:rPr lang="en-US"/>
+              <a:t>05.06.2025</a:t>
+            </a:r>
+            <a:endParaRPr lang="de-DE"/>
           </a:p>
         </p:txBody>
       </p:sp>
@@ -1514,9 +1524,10 @@
           <a:lstStyle/>
           <a:p>
             <a:r>
-              <a:rPr lang="de-DE"/>
-              <a:t>26.05.2025</a:t>
-            </a:r>
+              <a:rPr lang="en-US"/>
+              <a:t>05.06.2025</a:t>
+            </a:r>
+            <a:endParaRPr lang="de-DE"/>
           </a:p>
         </p:txBody>
       </p:sp>
@@ -1785,9 +1796,10 @@
           <a:lstStyle/>
           <a:p>
             <a:r>
-              <a:rPr lang="de-DE"/>
-              <a:t>26.05.2025</a:t>
-            </a:r>
+              <a:rPr lang="en-US"/>
+              <a:t>05.06.2025</a:t>
+            </a:r>
+            <a:endParaRPr lang="de-DE"/>
           </a:p>
         </p:txBody>
       </p:sp>
@@ -2203,9 +2215,10 @@
           <a:lstStyle/>
           <a:p>
             <a:r>
-              <a:rPr lang="de-DE"/>
-              <a:t>26.05.2025</a:t>
-            </a:r>
+              <a:rPr lang="en-US"/>
+              <a:t>05.06.2025</a:t>
+            </a:r>
+            <a:endParaRPr lang="de-DE"/>
           </a:p>
         </p:txBody>
       </p:sp>
@@ -2348,9 +2361,10 @@
           <a:lstStyle/>
           <a:p>
             <a:r>
-              <a:rPr lang="de-DE"/>
-              <a:t>26.05.2025</a:t>
-            </a:r>
+              <a:rPr lang="en-US"/>
+              <a:t>05.06.2025</a:t>
+            </a:r>
+            <a:endParaRPr lang="de-DE"/>
           </a:p>
         </p:txBody>
       </p:sp>
@@ -2464,9 +2478,10 @@
           <a:lstStyle/>
           <a:p>
             <a:r>
-              <a:rPr lang="de-DE"/>
-              <a:t>26.05.2025</a:t>
-            </a:r>
+              <a:rPr lang="en-US"/>
+              <a:t>05.06.2025</a:t>
+            </a:r>
+            <a:endParaRPr lang="de-DE"/>
           </a:p>
         </p:txBody>
       </p:sp>
@@ -2780,9 +2795,10 @@
           <a:lstStyle/>
           <a:p>
             <a:r>
-              <a:rPr lang="de-DE"/>
-              <a:t>26.05.2025</a:t>
-            </a:r>
+              <a:rPr lang="en-US"/>
+              <a:t>05.06.2025</a:t>
+            </a:r>
+            <a:endParaRPr lang="de-DE"/>
           </a:p>
         </p:txBody>
       </p:sp>
@@ -3072,9 +3088,10 @@
           <a:lstStyle/>
           <a:p>
             <a:r>
-              <a:rPr lang="de-DE"/>
-              <a:t>26.05.2025</a:t>
-            </a:r>
+              <a:rPr lang="en-US"/>
+              <a:t>05.06.2025</a:t>
+            </a:r>
+            <a:endParaRPr lang="de-DE"/>
           </a:p>
         </p:txBody>
       </p:sp>
@@ -3318,9 +3335,10 @@
           </a:lstStyle>
           <a:p>
             <a:r>
-              <a:rPr lang="de-DE"/>
-              <a:t>26.05.2025</a:t>
-            </a:r>
+              <a:rPr lang="en-US"/>
+              <a:t>05.06.2025</a:t>
+            </a:r>
+            <a:endParaRPr lang="de-DE"/>
           </a:p>
         </p:txBody>
       </p:sp>
@@ -3791,32 +3809,10 @@
               </a:rPr>
               <a:t>communication</a:t>
             </a:r>
-            <a:br>
-              <a:rPr lang="de-DE" sz="4000" dirty="0">
-                <a:latin typeface="Times New Roman" panose="02020603050405020304" pitchFamily="18" charset="0"/>
-                <a:cs typeface="Times New Roman" panose="02020603050405020304" pitchFamily="18" charset="0"/>
-              </a:rPr>
-            </a:br>
-            <a:r>
-              <a:rPr lang="de-DE" sz="4000" dirty="0">
-                <a:latin typeface="Times New Roman" panose="02020603050405020304" pitchFamily="18" charset="0"/>
-                <a:cs typeface="Times New Roman" panose="02020603050405020304" pitchFamily="18" charset="0"/>
-              </a:rPr>
-              <a:t>&amp;</a:t>
-            </a:r>
-            <a:br>
-              <a:rPr lang="de-DE" sz="4000" dirty="0">
-                <a:latin typeface="Times New Roman" panose="02020603050405020304" pitchFamily="18" charset="0"/>
-                <a:cs typeface="Times New Roman" panose="02020603050405020304" pitchFamily="18" charset="0"/>
-              </a:rPr>
-            </a:br>
-            <a:r>
-              <a:rPr lang="de-DE" sz="4000" dirty="0">
-                <a:latin typeface="Times New Roman" panose="02020603050405020304" pitchFamily="18" charset="0"/>
-                <a:cs typeface="Times New Roman" panose="02020603050405020304" pitchFamily="18" charset="0"/>
-              </a:rPr>
-              <a:t>Basic Programme</a:t>
-            </a:r>
+            <a:endParaRPr lang="de-DE" sz="4000" dirty="0">
+              <a:latin typeface="Times New Roman" panose="02020603050405020304" pitchFamily="18" charset="0"/>
+              <a:cs typeface="Times New Roman" panose="02020603050405020304" pitchFamily="18" charset="0"/>
+            </a:endParaRPr>
           </a:p>
         </p:txBody>
       </p:sp>
@@ -3914,9 +3910,10 @@
           <a:lstStyle/>
           <a:p>
             <a:r>
-              <a:rPr lang="de-DE"/>
-              <a:t>26.05.2025</a:t>
-            </a:r>
+              <a:rPr lang="en-US"/>
+              <a:t>05.06.2025</a:t>
+            </a:r>
+            <a:endParaRPr lang="de-DE" dirty="0"/>
           </a:p>
         </p:txBody>
       </p:sp>
@@ -3982,6 +3979,309 @@
     <p:extLst>
       <p:ext uri="{BB962C8B-B14F-4D97-AF65-F5344CB8AC3E}">
         <p14:creationId xmlns:p14="http://schemas.microsoft.com/office/powerpoint/2010/main" val="632304154"/>
+      </p:ext>
+    </p:extLst>
+  </p:cSld>
+  <p:clrMapOvr>
+    <a:masterClrMapping/>
+  </p:clrMapOvr>
+</p:sld>
+</file>
+
+<file path=ppt/slides/slide10.xml><?xml version="1.0" encoding="utf-8"?>
+<p:sld xmlns:a="http://schemas.openxmlformats.org/drawingml/2006/main" xmlns:r="http://schemas.openxmlformats.org/officeDocument/2006/relationships" xmlns:p="http://schemas.openxmlformats.org/presentationml/2006/main">
+  <p:cSld>
+    <p:spTree>
+      <p:nvGrpSpPr>
+        <p:cNvPr id="1" name=""/>
+        <p:cNvGrpSpPr/>
+        <p:nvPr/>
+      </p:nvGrpSpPr>
+      <p:grpSpPr>
+        <a:xfrm>
+          <a:off x="0" y="0"/>
+          <a:ext cx="0" cy="0"/>
+          <a:chOff x="0" y="0"/>
+          <a:chExt cx="0" cy="0"/>
+        </a:xfrm>
+      </p:grpSpPr>
+      <p:sp>
+        <p:nvSpPr>
+          <p:cNvPr id="2" name="Title 1">
+            <a:extLst>
+              <a:ext uri="{FF2B5EF4-FFF2-40B4-BE49-F238E27FC236}">
+                <a16:creationId xmlns:a16="http://schemas.microsoft.com/office/drawing/2014/main" id="{7AC46FCE-F9C7-6EBA-A389-8EFFE9785899}"/>
+              </a:ext>
+            </a:extLst>
+          </p:cNvPr>
+          <p:cNvSpPr>
+            <a:spLocks noGrp="1"/>
+          </p:cNvSpPr>
+          <p:nvPr>
+            <p:ph type="title"/>
+          </p:nvPr>
+        </p:nvSpPr>
+        <p:spPr/>
+        <p:txBody>
+          <a:bodyPr/>
+          <a:lstStyle/>
+          <a:p>
+            <a:r>
+              <a:rPr lang="en-IN" dirty="0">
+                <a:latin typeface="Times New Roman" panose="02020603050405020304" pitchFamily="18" charset="0"/>
+                <a:cs typeface="Times New Roman" panose="02020603050405020304" pitchFamily="18" charset="0"/>
+              </a:rPr>
+              <a:t>References:</a:t>
+            </a:r>
+          </a:p>
+        </p:txBody>
+      </p:sp>
+      <p:sp>
+        <p:nvSpPr>
+          <p:cNvPr id="3" name="Content Placeholder 2">
+            <a:extLst>
+              <a:ext uri="{FF2B5EF4-FFF2-40B4-BE49-F238E27FC236}">
+                <a16:creationId xmlns:a16="http://schemas.microsoft.com/office/drawing/2014/main" id="{21089575-3086-3FC5-A09E-F496391BB820}"/>
+              </a:ext>
+            </a:extLst>
+          </p:cNvPr>
+          <p:cNvSpPr>
+            <a:spLocks noGrp="1"/>
+          </p:cNvSpPr>
+          <p:nvPr>
+            <p:ph idx="1"/>
+          </p:nvPr>
+        </p:nvSpPr>
+        <p:spPr/>
+        <p:txBody>
+          <a:bodyPr>
+            <a:normAutofit/>
+          </a:bodyPr>
+          <a:lstStyle/>
+          <a:p>
+            <a:r>
+              <a:rPr lang="en-IN" dirty="0">
+                <a:latin typeface="Times New Roman" panose="02020603050405020304" pitchFamily="18" charset="0"/>
+                <a:cs typeface="Times New Roman" panose="02020603050405020304" pitchFamily="18" charset="0"/>
+              </a:rPr>
+              <a:t>SPOT SDK – SPOT documentation</a:t>
+            </a:r>
+            <a:br>
+              <a:rPr lang="en-IN" dirty="0">
+                <a:latin typeface="Times New Roman" panose="02020603050405020304" pitchFamily="18" charset="0"/>
+                <a:cs typeface="Times New Roman" panose="02020603050405020304" pitchFamily="18" charset="0"/>
+              </a:rPr>
+            </a:br>
+            <a:r>
+              <a:rPr lang="en-IN" dirty="0">
+                <a:latin typeface="Times New Roman" panose="02020603050405020304" pitchFamily="18" charset="0"/>
+                <a:cs typeface="Times New Roman" panose="02020603050405020304" pitchFamily="18" charset="0"/>
+                <a:hlinkClick r:id="rId2"/>
+              </a:rPr>
+              <a:t>https://dev.bostondynamics.com/docs/concepts/robot_services</a:t>
+            </a:r>
+            <a:r>
+              <a:rPr lang="en-IN" dirty="0">
+                <a:latin typeface="Times New Roman" panose="02020603050405020304" pitchFamily="18" charset="0"/>
+                <a:cs typeface="Times New Roman" panose="02020603050405020304" pitchFamily="18" charset="0"/>
+              </a:rPr>
+              <a:t> [1]</a:t>
+            </a:r>
+            <a:br>
+              <a:rPr lang="en-IN" dirty="0">
+                <a:latin typeface="Times New Roman" panose="02020603050405020304" pitchFamily="18" charset="0"/>
+                <a:cs typeface="Times New Roman" panose="02020603050405020304" pitchFamily="18" charset="0"/>
+              </a:rPr>
+            </a:br>
+            <a:r>
+              <a:rPr lang="en-IN" dirty="0">
+                <a:latin typeface="Times New Roman" panose="02020603050405020304" pitchFamily="18" charset="0"/>
+                <a:cs typeface="Times New Roman" panose="02020603050405020304" pitchFamily="18" charset="0"/>
+                <a:hlinkClick r:id="rId3"/>
+              </a:rPr>
+              <a:t>https://dev.bostondynamics.com/docs/concepts/networking</a:t>
+            </a:r>
+            <a:r>
+              <a:rPr lang="en-IN" dirty="0">
+                <a:latin typeface="Times New Roman" panose="02020603050405020304" pitchFamily="18" charset="0"/>
+                <a:cs typeface="Times New Roman" panose="02020603050405020304" pitchFamily="18" charset="0"/>
+              </a:rPr>
+              <a:t> [2]</a:t>
+            </a:r>
+          </a:p>
+          <a:p>
+            <a:endParaRPr lang="en-IN" dirty="0">
+              <a:latin typeface="Times New Roman" panose="02020603050405020304" pitchFamily="18" charset="0"/>
+              <a:cs typeface="Times New Roman" panose="02020603050405020304" pitchFamily="18" charset="0"/>
+            </a:endParaRPr>
+          </a:p>
+          <a:p>
+            <a:r>
+              <a:rPr lang="en-IN" dirty="0">
+                <a:latin typeface="Times New Roman" panose="02020603050405020304" pitchFamily="18" charset="0"/>
+                <a:cs typeface="Times New Roman" panose="02020603050405020304" pitchFamily="18" charset="0"/>
+              </a:rPr>
+              <a:t>gRPC website</a:t>
+            </a:r>
+            <a:br>
+              <a:rPr lang="en-IN" dirty="0">
+                <a:latin typeface="Times New Roman" panose="02020603050405020304" pitchFamily="18" charset="0"/>
+                <a:cs typeface="Times New Roman" panose="02020603050405020304" pitchFamily="18" charset="0"/>
+              </a:rPr>
+            </a:br>
+            <a:r>
+              <a:rPr lang="en-IN" dirty="0">
+                <a:latin typeface="Times New Roman" panose="02020603050405020304" pitchFamily="18" charset="0"/>
+                <a:cs typeface="Times New Roman" panose="02020603050405020304" pitchFamily="18" charset="0"/>
+                <a:hlinkClick r:id="rId4"/>
+              </a:rPr>
+              <a:t>https://grpc.io/docs/what-is-grpc/introduction</a:t>
+            </a:r>
+            <a:r>
+              <a:rPr lang="en-IN" dirty="0">
+                <a:latin typeface="Times New Roman" panose="02020603050405020304" pitchFamily="18" charset="0"/>
+                <a:cs typeface="Times New Roman" panose="02020603050405020304" pitchFamily="18" charset="0"/>
+              </a:rPr>
+              <a:t> [3]</a:t>
+            </a:r>
+            <a:br>
+              <a:rPr lang="en-IN" dirty="0">
+                <a:latin typeface="Times New Roman" panose="02020603050405020304" pitchFamily="18" charset="0"/>
+                <a:cs typeface="Times New Roman" panose="02020603050405020304" pitchFamily="18" charset="0"/>
+              </a:rPr>
+            </a:br>
+            <a:r>
+              <a:rPr lang="en-IN" dirty="0">
+                <a:latin typeface="Times New Roman" panose="02020603050405020304" pitchFamily="18" charset="0"/>
+                <a:cs typeface="Times New Roman" panose="02020603050405020304" pitchFamily="18" charset="0"/>
+                <a:hlinkClick r:id="rId5"/>
+              </a:rPr>
+              <a:t>https://grpc.io/docs/what-is-grpc/core-concepts</a:t>
+            </a:r>
+            <a:r>
+              <a:rPr lang="en-IN" dirty="0">
+                <a:latin typeface="Times New Roman" panose="02020603050405020304" pitchFamily="18" charset="0"/>
+                <a:cs typeface="Times New Roman" panose="02020603050405020304" pitchFamily="18" charset="0"/>
+              </a:rPr>
+              <a:t> [4]</a:t>
+            </a:r>
+          </a:p>
+          <a:p>
+            <a:endParaRPr lang="en-IN" dirty="0">
+              <a:latin typeface="Times New Roman" panose="02020603050405020304" pitchFamily="18" charset="0"/>
+              <a:cs typeface="Times New Roman" panose="02020603050405020304" pitchFamily="18" charset="0"/>
+            </a:endParaRPr>
+          </a:p>
+          <a:p>
+            <a:r>
+              <a:rPr lang="en-IN" dirty="0">
+                <a:latin typeface="Times New Roman" panose="02020603050405020304" pitchFamily="18" charset="0"/>
+                <a:cs typeface="Times New Roman" panose="02020603050405020304" pitchFamily="18" charset="0"/>
+                <a:hlinkClick r:id="rId6"/>
+              </a:rPr>
+              <a:t>https://protobuf.dev/overview</a:t>
+            </a:r>
+            <a:r>
+              <a:rPr lang="en-IN" dirty="0">
+                <a:latin typeface="Times New Roman" panose="02020603050405020304" pitchFamily="18" charset="0"/>
+                <a:cs typeface="Times New Roman" panose="02020603050405020304" pitchFamily="18" charset="0"/>
+              </a:rPr>
+              <a:t> [5]</a:t>
+            </a:r>
+          </a:p>
+        </p:txBody>
+      </p:sp>
+      <p:sp>
+        <p:nvSpPr>
+          <p:cNvPr id="4" name="Date Placeholder 3">
+            <a:extLst>
+              <a:ext uri="{FF2B5EF4-FFF2-40B4-BE49-F238E27FC236}">
+                <a16:creationId xmlns:a16="http://schemas.microsoft.com/office/drawing/2014/main" id="{08B8AE87-AB29-4511-9939-306A476605B2}"/>
+              </a:ext>
+            </a:extLst>
+          </p:cNvPr>
+          <p:cNvSpPr>
+            <a:spLocks noGrp="1"/>
+          </p:cNvSpPr>
+          <p:nvPr>
+            <p:ph type="dt" sz="half" idx="10"/>
+          </p:nvPr>
+        </p:nvSpPr>
+        <p:spPr/>
+        <p:txBody>
+          <a:bodyPr/>
+          <a:lstStyle/>
+          <a:p>
+            <a:r>
+              <a:rPr lang="en-US"/>
+              <a:t>05.06.2025</a:t>
+            </a:r>
+            <a:endParaRPr lang="de-DE" dirty="0"/>
+          </a:p>
+        </p:txBody>
+      </p:sp>
+      <p:sp>
+        <p:nvSpPr>
+          <p:cNvPr id="5" name="Footer Placeholder 4">
+            <a:extLst>
+              <a:ext uri="{FF2B5EF4-FFF2-40B4-BE49-F238E27FC236}">
+                <a16:creationId xmlns:a16="http://schemas.microsoft.com/office/drawing/2014/main" id="{32F2723D-598D-397A-21C9-E4062196A04F}"/>
+              </a:ext>
+            </a:extLst>
+          </p:cNvPr>
+          <p:cNvSpPr>
+            <a:spLocks noGrp="1"/>
+          </p:cNvSpPr>
+          <p:nvPr>
+            <p:ph type="ftr" sz="quarter" idx="11"/>
+          </p:nvPr>
+        </p:nvSpPr>
+        <p:spPr/>
+        <p:txBody>
+          <a:bodyPr/>
+          <a:lstStyle/>
+          <a:p>
+            <a:r>
+              <a:rPr lang="en-IN"/>
+              <a:t>IDT projects | GDSPOT | SoSe 2025</a:t>
+            </a:r>
+            <a:endParaRPr lang="de-DE"/>
+          </a:p>
+        </p:txBody>
+      </p:sp>
+      <p:sp>
+        <p:nvSpPr>
+          <p:cNvPr id="6" name="Slide Number Placeholder 5">
+            <a:extLst>
+              <a:ext uri="{FF2B5EF4-FFF2-40B4-BE49-F238E27FC236}">
+                <a16:creationId xmlns:a16="http://schemas.microsoft.com/office/drawing/2014/main" id="{E84B2434-079F-4CFE-EFF5-2FDBC0D37C5F}"/>
+              </a:ext>
+            </a:extLst>
+          </p:cNvPr>
+          <p:cNvSpPr>
+            <a:spLocks noGrp="1"/>
+          </p:cNvSpPr>
+          <p:nvPr>
+            <p:ph type="sldNum" sz="quarter" idx="12"/>
+          </p:nvPr>
+        </p:nvSpPr>
+        <p:spPr/>
+        <p:txBody>
+          <a:bodyPr/>
+          <a:lstStyle/>
+          <a:p>
+            <a:fld id="{516988D0-1470-4690-BDE1-E3A50181EF78}" type="slidenum">
+              <a:rPr lang="de-DE" smtClean="0"/>
+              <a:t>10</a:t>
+            </a:fld>
+            <a:endParaRPr lang="de-DE"/>
+          </a:p>
+        </p:txBody>
+      </p:sp>
+    </p:spTree>
+    <p:extLst>
+      <p:ext uri="{BB962C8B-B14F-4D97-AF65-F5344CB8AC3E}">
+        <p14:creationId xmlns:p14="http://schemas.microsoft.com/office/powerpoint/2010/main" val="1051072451"/>
       </p:ext>
     </p:extLst>
   </p:cSld>
@@ -4029,6 +4329,7 @@
           <a:bodyPr/>
           <a:lstStyle/>
           <a:p>
+            <a:pPr algn="ctr"/>
             <a:r>
               <a:rPr lang="en-IN" dirty="0">
                 <a:latin typeface="Times New Roman" panose="02020603050405020304" pitchFamily="18" charset="0"/>
@@ -4037,166 +4338,49 @@
               </a:rPr>
               <a:t>RPC (Remote Procedure Call)</a:t>
             </a:r>
-            <a:r>
-              <a:rPr lang="en-IN" dirty="0">
-                <a:latin typeface="Times New Roman" panose="02020603050405020304" pitchFamily="18" charset="0"/>
-                <a:cs typeface="Times New Roman" panose="02020603050405020304" pitchFamily="18" charset="0"/>
-              </a:rPr>
-              <a:t> and Robot services</a:t>
-            </a:r>
-          </a:p>
-        </p:txBody>
-      </p:sp>
-      <p:sp>
-        <p:nvSpPr>
-          <p:cNvPr id="3" name="Content Placeholder 2">
-            <a:extLst>
-              <a:ext uri="{FF2B5EF4-FFF2-40B4-BE49-F238E27FC236}">
-                <a16:creationId xmlns:a16="http://schemas.microsoft.com/office/drawing/2014/main" id="{89DEB8F0-937E-69A5-7A1A-CEC12D0B0060}"/>
-              </a:ext>
-            </a:extLst>
-          </p:cNvPr>
-          <p:cNvSpPr>
-            <a:spLocks noGrp="1"/>
-          </p:cNvSpPr>
-          <p:nvPr>
-            <p:ph idx="1"/>
-          </p:nvPr>
-        </p:nvSpPr>
-        <p:spPr/>
-        <p:txBody>
-          <a:bodyPr>
-            <a:normAutofit lnSpcReduction="10000"/>
-          </a:bodyPr>
-          <a:lstStyle/>
-          <a:p>
-            <a:r>
-              <a:rPr lang="en-IN" dirty="0">
-                <a:latin typeface="Times New Roman" panose="02020603050405020304" pitchFamily="18" charset="0"/>
-                <a:cs typeface="Times New Roman" panose="02020603050405020304" pitchFamily="18" charset="0"/>
-              </a:rPr>
-              <a:t>Boston Dynamics have selected </a:t>
-            </a:r>
-            <a:r>
-              <a:rPr lang="en-IN" dirty="0" err="1">
-                <a:latin typeface="Times New Roman" panose="02020603050405020304" pitchFamily="18" charset="0"/>
-                <a:cs typeface="Times New Roman" panose="02020603050405020304" pitchFamily="18" charset="0"/>
-                <a:hlinkClick r:id="rId3"/>
-              </a:rPr>
-              <a:t>gRPC</a:t>
-            </a:r>
-            <a:r>
-              <a:rPr lang="en-IN" dirty="0">
-                <a:latin typeface="Times New Roman" panose="02020603050405020304" pitchFamily="18" charset="0"/>
-                <a:cs typeface="Times New Roman" panose="02020603050405020304" pitchFamily="18" charset="0"/>
-              </a:rPr>
-              <a:t> as the application-level protocol for most of the SPOT </a:t>
-            </a:r>
-            <a:r>
-              <a:rPr lang="en-IN" dirty="0">
-                <a:latin typeface="Times New Roman" panose="02020603050405020304" pitchFamily="18" charset="0"/>
-                <a:cs typeface="Times New Roman" panose="02020603050405020304" pitchFamily="18" charset="0"/>
-                <a:hlinkClick r:id="rId4"/>
-              </a:rPr>
-              <a:t>API</a:t>
-            </a:r>
-            <a:r>
-              <a:rPr lang="en-IN" dirty="0">
-                <a:latin typeface="Times New Roman" panose="02020603050405020304" pitchFamily="18" charset="0"/>
-                <a:cs typeface="Times New Roman" panose="02020603050405020304" pitchFamily="18" charset="0"/>
-              </a:rPr>
-              <a:t>.</a:t>
-            </a:r>
-          </a:p>
-          <a:p>
-            <a:r>
-              <a:rPr lang="en-IN" dirty="0">
-                <a:latin typeface="Times New Roman" panose="02020603050405020304" pitchFamily="18" charset="0"/>
-                <a:cs typeface="Times New Roman" panose="02020603050405020304" pitchFamily="18" charset="0"/>
-              </a:rPr>
-              <a:t>The robot services can be accessed/called using the API protocols from the open source </a:t>
-            </a:r>
-            <a:r>
-              <a:rPr lang="en-IN" dirty="0">
-                <a:latin typeface="Times New Roman" panose="02020603050405020304" pitchFamily="18" charset="0"/>
-                <a:cs typeface="Times New Roman" panose="02020603050405020304" pitchFamily="18" charset="0"/>
-                <a:hlinkClick r:id="rId5"/>
-              </a:rPr>
-              <a:t>SDK</a:t>
-            </a:r>
-            <a:r>
-              <a:rPr lang="en-IN" dirty="0">
-                <a:latin typeface="Times New Roman" panose="02020603050405020304" pitchFamily="18" charset="0"/>
-                <a:cs typeface="Times New Roman" panose="02020603050405020304" pitchFamily="18" charset="0"/>
-              </a:rPr>
-              <a:t>.</a:t>
-            </a:r>
-          </a:p>
-          <a:p>
-            <a:r>
-              <a:rPr lang="en-IN" dirty="0" err="1">
-                <a:latin typeface="Times New Roman" panose="02020603050405020304" pitchFamily="18" charset="0"/>
-                <a:cs typeface="Times New Roman" panose="02020603050405020304" pitchFamily="18" charset="0"/>
-              </a:rPr>
-              <a:t>gRPC</a:t>
-            </a:r>
-            <a:r>
-              <a:rPr lang="en-IN" dirty="0">
-                <a:latin typeface="Times New Roman" panose="02020603050405020304" pitchFamily="18" charset="0"/>
-                <a:cs typeface="Times New Roman" panose="02020603050405020304" pitchFamily="18" charset="0"/>
-              </a:rPr>
-              <a:t> was chosen because it provides a secure, performant protocol with support for a broad set of programming languages and environments. </a:t>
-            </a:r>
-            <a:r>
-              <a:rPr lang="en-IN" dirty="0">
-                <a:latin typeface="Times New Roman" panose="02020603050405020304" pitchFamily="18" charset="0"/>
-                <a:cs typeface="Times New Roman" panose="02020603050405020304" pitchFamily="18" charset="0"/>
-                <a:hlinkClick r:id="rId6" action="ppaction://hlinksldjump"/>
-              </a:rPr>
-              <a:t>[1]</a:t>
-            </a:r>
             <a:endParaRPr lang="en-IN" dirty="0">
               <a:latin typeface="Times New Roman" panose="02020603050405020304" pitchFamily="18" charset="0"/>
               <a:cs typeface="Times New Roman" panose="02020603050405020304" pitchFamily="18" charset="0"/>
             </a:endParaRPr>
           </a:p>
-          <a:p>
-            <a:r>
-              <a:rPr lang="en-IN" dirty="0">
-                <a:latin typeface="Times New Roman" panose="02020603050405020304" pitchFamily="18" charset="0"/>
-                <a:cs typeface="Times New Roman" panose="02020603050405020304" pitchFamily="18" charset="0"/>
-              </a:rPr>
-              <a:t>It is although possible to define new </a:t>
-            </a:r>
-            <a:r>
-              <a:rPr lang="en-IN" dirty="0" err="1">
-                <a:latin typeface="Times New Roman" panose="02020603050405020304" pitchFamily="18" charset="0"/>
-                <a:cs typeface="Times New Roman" panose="02020603050405020304" pitchFamily="18" charset="0"/>
-              </a:rPr>
-              <a:t>protobuf</a:t>
-            </a:r>
-            <a:r>
-              <a:rPr lang="en-IN" dirty="0">
-                <a:latin typeface="Times New Roman" panose="02020603050405020304" pitchFamily="18" charset="0"/>
-                <a:cs typeface="Times New Roman" panose="02020603050405020304" pitchFamily="18" charset="0"/>
-              </a:rPr>
-              <a:t> (proto buffers) and services like Image, Data Acquisition Plugin, Network Compute Bridge Worker, Remote Mission and Area Callback support service customization </a:t>
-            </a:r>
-            <a:r>
-              <a:rPr lang="en-IN" dirty="0">
-                <a:latin typeface="Times New Roman" panose="02020603050405020304" pitchFamily="18" charset="0"/>
-                <a:cs typeface="Times New Roman" panose="02020603050405020304" pitchFamily="18" charset="0"/>
-                <a:hlinkClick r:id="rId6" action="ppaction://hlinksldjump"/>
-              </a:rPr>
-              <a:t>[1]</a:t>
-            </a:r>
-            <a:endParaRPr lang="en-IN" dirty="0">
-              <a:latin typeface="Times New Roman" panose="02020603050405020304" pitchFamily="18" charset="0"/>
-              <a:cs typeface="Times New Roman" panose="02020603050405020304" pitchFamily="18" charset="0"/>
-            </a:endParaRPr>
-          </a:p>
-        </p:txBody>
-      </p:sp>
+        </p:txBody>
+      </p:sp>
+      <p:pic>
+        <p:nvPicPr>
+          <p:cNvPr id="10" name="Content Placeholder 9">
+            <a:hlinkClick r:id="rId3" action="ppaction://hlinksldjump"/>
+            <a:extLst>
+              <a:ext uri="{FF2B5EF4-FFF2-40B4-BE49-F238E27FC236}">
+                <a16:creationId xmlns:a16="http://schemas.microsoft.com/office/drawing/2014/main" id="{CF4847C5-CEBD-EF31-E54F-432F9BB97D3C}"/>
+              </a:ext>
+            </a:extLst>
+          </p:cNvPr>
+          <p:cNvPicPr>
+            <a:picLocks noGrp="1" noChangeAspect="1"/>
+          </p:cNvPicPr>
+          <p:nvPr>
+            <p:ph idx="1"/>
+          </p:nvPr>
+        </p:nvPicPr>
+        <p:blipFill>
+          <a:blip r:embed="rId4">
+            <a:extLst>
+              <a:ext uri="{28A0092B-C50C-407E-A947-70E740481C1C}">
+                <a14:useLocalDpi xmlns:a14="http://schemas.microsoft.com/office/drawing/2010/main" val="0"/>
+              </a:ext>
+            </a:extLst>
+          </a:blip>
+          <a:stretch>
+            <a:fillRect/>
+          </a:stretch>
+        </p:blipFill>
+        <p:spPr>
+          <a:xfrm>
+            <a:off x="2233399" y="1690688"/>
+            <a:ext cx="7753350" cy="4665662"/>
+          </a:xfrm>
+        </p:spPr>
+      </p:pic>
       <p:sp>
         <p:nvSpPr>
           <p:cNvPr id="4" name="Date Placeholder 3">
@@ -4219,9 +4403,10 @@
           <a:lstStyle/>
           <a:p>
             <a:r>
-              <a:rPr lang="de-DE"/>
-              <a:t>26.05.2025</a:t>
-            </a:r>
+              <a:rPr lang="en-US"/>
+              <a:t>05.06.2025</a:t>
+            </a:r>
+            <a:endParaRPr lang="de-DE"/>
           </a:p>
         </p:txBody>
       </p:sp>
@@ -4334,129 +4519,181 @@
           <a:bodyPr/>
           <a:lstStyle/>
           <a:p>
+            <a:pPr algn="ctr"/>
             <a:r>
               <a:rPr lang="en-IN" dirty="0">
                 <a:latin typeface="Times New Roman" panose="02020603050405020304" pitchFamily="18" charset="0"/>
                 <a:cs typeface="Times New Roman" panose="02020603050405020304" pitchFamily="18" charset="0"/>
                 <a:hlinkClick r:id="rId2"/>
               </a:rPr>
-              <a:t>RPC (Remote Procedure Call)</a:t>
-            </a:r>
+              <a:t>gRPC</a:t>
+            </a:r>
+            <a:endParaRPr lang="en-IN" dirty="0">
+              <a:latin typeface="Times New Roman" panose="02020603050405020304" pitchFamily="18" charset="0"/>
+              <a:cs typeface="Times New Roman" panose="02020603050405020304" pitchFamily="18" charset="0"/>
+            </a:endParaRPr>
+          </a:p>
+        </p:txBody>
+      </p:sp>
+      <p:sp>
+        <p:nvSpPr>
+          <p:cNvPr id="3" name="Content Placeholder 2">
+            <a:extLst>
+              <a:ext uri="{FF2B5EF4-FFF2-40B4-BE49-F238E27FC236}">
+                <a16:creationId xmlns:a16="http://schemas.microsoft.com/office/drawing/2014/main" id="{89DEB8F0-937E-69A5-7A1A-CEC12D0B0060}"/>
+              </a:ext>
+            </a:extLst>
+          </p:cNvPr>
+          <p:cNvSpPr>
+            <a:spLocks noGrp="1"/>
+          </p:cNvSpPr>
+          <p:nvPr>
+            <p:ph idx="1"/>
+          </p:nvPr>
+        </p:nvSpPr>
+        <p:spPr/>
+        <p:txBody>
+          <a:bodyPr>
+            <a:normAutofit fontScale="92500" lnSpcReduction="20000"/>
+          </a:bodyPr>
+          <a:lstStyle/>
+          <a:p>
             <a:r>
               <a:rPr lang="en-IN" dirty="0">
                 <a:latin typeface="Times New Roman" panose="02020603050405020304" pitchFamily="18" charset="0"/>
                 <a:cs typeface="Times New Roman" panose="02020603050405020304" pitchFamily="18" charset="0"/>
               </a:rPr>
-              <a:t> and Robot services (Autonomous services)</a:t>
-            </a:r>
-          </a:p>
-        </p:txBody>
-      </p:sp>
-      <p:sp>
-        <p:nvSpPr>
-          <p:cNvPr id="3" name="Content Placeholder 2">
-            <a:extLst>
-              <a:ext uri="{FF2B5EF4-FFF2-40B4-BE49-F238E27FC236}">
-                <a16:creationId xmlns:a16="http://schemas.microsoft.com/office/drawing/2014/main" id="{89DEB8F0-937E-69A5-7A1A-CEC12D0B0060}"/>
-              </a:ext>
-            </a:extLst>
-          </p:cNvPr>
-          <p:cNvSpPr>
-            <a:spLocks noGrp="1"/>
-          </p:cNvSpPr>
-          <p:nvPr>
-            <p:ph idx="1"/>
-          </p:nvPr>
-        </p:nvSpPr>
-        <p:spPr/>
-        <p:txBody>
-          <a:bodyPr>
-            <a:normAutofit/>
-          </a:bodyPr>
-          <a:lstStyle/>
+              <a:t>The open source RPC framework developed by google.</a:t>
+            </a:r>
+          </a:p>
           <a:p>
             <a:r>
               <a:rPr lang="en-IN" dirty="0">
                 <a:latin typeface="Times New Roman" panose="02020603050405020304" pitchFamily="18" charset="0"/>
                 <a:cs typeface="Times New Roman" panose="02020603050405020304" pitchFamily="18" charset="0"/>
               </a:rPr>
-              <a:t>The Autonomous services like </a:t>
+              <a:t>The clients and the server are connected using this framework</a:t>
+            </a:r>
+          </a:p>
+          <a:p>
+            <a:r>
+              <a:rPr lang="en-IN" dirty="0">
+                <a:latin typeface="Times New Roman" panose="02020603050405020304" pitchFamily="18" charset="0"/>
+                <a:cs typeface="Times New Roman" panose="02020603050405020304" pitchFamily="18" charset="0"/>
+              </a:rPr>
+              <a:t>In our case, the SPOT robot is the server and the client can be either the tablet or any connected PC.</a:t>
+            </a:r>
+          </a:p>
+          <a:p>
+            <a:r>
+              <a:rPr lang="en-IN" dirty="0">
+                <a:latin typeface="Times New Roman" panose="02020603050405020304" pitchFamily="18" charset="0"/>
+                <a:cs typeface="Times New Roman" panose="02020603050405020304" pitchFamily="18" charset="0"/>
+              </a:rPr>
+              <a:t>Protocol buffers are used to communicate. Protocol Buffers are a language-neutral, platform-neutral extensible mechanism for serializing structured data.</a:t>
+            </a:r>
+            <a:r>
+              <a:rPr lang="en-IN" baseline="-25000" dirty="0">
+                <a:latin typeface="Times New Roman" panose="02020603050405020304" pitchFamily="18" charset="0"/>
+                <a:cs typeface="Times New Roman" panose="02020603050405020304" pitchFamily="18" charset="0"/>
+                <a:hlinkClick r:id="rId3" action="ppaction://hlinksldjump"/>
+              </a:rPr>
+              <a:t>[5]</a:t>
+            </a:r>
+            <a:r>
+              <a:rPr lang="en-IN" dirty="0">
+                <a:latin typeface="Times New Roman" panose="02020603050405020304" pitchFamily="18" charset="0"/>
+                <a:cs typeface="Times New Roman" panose="02020603050405020304" pitchFamily="18" charset="0"/>
+              </a:rPr>
+              <a:t> Google’s mature open source mechanism for serializing structured data.</a:t>
+            </a:r>
+            <a:r>
+              <a:rPr lang="en-IN" baseline="-25000" dirty="0">
+                <a:latin typeface="Times New Roman" panose="02020603050405020304" pitchFamily="18" charset="0"/>
+                <a:cs typeface="Times New Roman" panose="02020603050405020304" pitchFamily="18" charset="0"/>
+                <a:hlinkClick r:id="rId3" action="ppaction://hlinksldjump"/>
+              </a:rPr>
+              <a:t>[3]</a:t>
+            </a:r>
+            <a:endParaRPr lang="en-IN" baseline="-25000" dirty="0">
+              <a:latin typeface="Times New Roman" panose="02020603050405020304" pitchFamily="18" charset="0"/>
+              <a:cs typeface="Times New Roman" panose="02020603050405020304" pitchFamily="18" charset="0"/>
+            </a:endParaRPr>
+          </a:p>
+          <a:p>
+            <a:r>
+              <a:rPr lang="en-IN" dirty="0">
+                <a:latin typeface="Times New Roman" panose="02020603050405020304" pitchFamily="18" charset="0"/>
+                <a:cs typeface="Times New Roman" panose="02020603050405020304" pitchFamily="18" charset="0"/>
+              </a:rPr>
+              <a:t>The protocol buffers are defined using “.proto” extension definition files.  The structure for the data is defined in this file.</a:t>
+            </a:r>
+            <a:r>
+              <a:rPr lang="en-IN" baseline="-25000" dirty="0">
+                <a:latin typeface="Times New Roman" panose="02020603050405020304" pitchFamily="18" charset="0"/>
+                <a:cs typeface="Times New Roman" panose="02020603050405020304" pitchFamily="18" charset="0"/>
+                <a:hlinkClick r:id="rId3" action="ppaction://hlinksldjump"/>
+              </a:rPr>
+              <a:t> [3]</a:t>
+            </a:r>
+            <a:endParaRPr lang="en-IN" dirty="0">
+              <a:latin typeface="Times New Roman" panose="02020603050405020304" pitchFamily="18" charset="0"/>
+              <a:cs typeface="Times New Roman" panose="02020603050405020304" pitchFamily="18" charset="0"/>
+            </a:endParaRPr>
+          </a:p>
+          <a:p>
+            <a:r>
+              <a:rPr lang="en-IN" dirty="0">
+                <a:latin typeface="Times New Roman" panose="02020603050405020304" pitchFamily="18" charset="0"/>
+                <a:cs typeface="Times New Roman" panose="02020603050405020304" pitchFamily="18" charset="0"/>
+              </a:rPr>
+              <a:t>A protocol buffer compiler (</a:t>
             </a:r>
             <a:r>
               <a:rPr lang="en-IN" dirty="0" err="1">
                 <a:latin typeface="Times New Roman" panose="02020603050405020304" pitchFamily="18" charset="0"/>
                 <a:cs typeface="Times New Roman" panose="02020603050405020304" pitchFamily="18" charset="0"/>
               </a:rPr>
-              <a:t>GraphNav</a:t>
+              <a:t>protoc</a:t>
             </a:r>
             <a:r>
               <a:rPr lang="en-IN" dirty="0">
                 <a:latin typeface="Times New Roman" panose="02020603050405020304" pitchFamily="18" charset="0"/>
                 <a:cs typeface="Times New Roman" panose="02020603050405020304" pitchFamily="18" charset="0"/>
               </a:rPr>
-              <a:t> allow to localize the robot.  But the initial run needs to be done by the client to have an offline map and assign actions like API callbacks at various waypoints along the way. </a:t>
-            </a:r>
-            <a:r>
-              <a:rPr lang="en-IN" dirty="0">
+              <a:t>) generates data access classes in your preferred language(s) from your proto definition.</a:t>
+            </a:r>
+            <a:r>
+              <a:rPr lang="en-IN" baseline="-25000" dirty="0">
                 <a:latin typeface="Times New Roman" panose="02020603050405020304" pitchFamily="18" charset="0"/>
                 <a:cs typeface="Times New Roman" panose="02020603050405020304" pitchFamily="18" charset="0"/>
                 <a:hlinkClick r:id="rId3" action="ppaction://hlinksldjump"/>
               </a:rPr>
-              <a:t>[1]</a:t>
-            </a:r>
+              <a:t>[3]</a:t>
+            </a:r>
+            <a:endParaRPr lang="en-IN" baseline="-25000" dirty="0">
+              <a:latin typeface="Times New Roman" panose="02020603050405020304" pitchFamily="18" charset="0"/>
+              <a:cs typeface="Times New Roman" panose="02020603050405020304" pitchFamily="18" charset="0"/>
+            </a:endParaRPr>
+          </a:p>
+          <a:p>
             <a:endParaRPr lang="en-IN" dirty="0">
               <a:latin typeface="Times New Roman" panose="02020603050405020304" pitchFamily="18" charset="0"/>
               <a:cs typeface="Times New Roman" panose="02020603050405020304" pitchFamily="18" charset="0"/>
             </a:endParaRPr>
           </a:p>
           <a:p>
-            <a:r>
-              <a:rPr lang="en-IN" dirty="0">
-                <a:latin typeface="Times New Roman" panose="02020603050405020304" pitchFamily="18" charset="0"/>
-                <a:cs typeface="Times New Roman" panose="02020603050405020304" pitchFamily="18" charset="0"/>
-              </a:rPr>
-              <a:t>The Mission service provides much more robust programming options, but requires constant client server communication. </a:t>
-            </a:r>
-            <a:r>
-              <a:rPr lang="en-IN" dirty="0">
-                <a:latin typeface="Times New Roman" panose="02020603050405020304" pitchFamily="18" charset="0"/>
-                <a:cs typeface="Times New Roman" panose="02020603050405020304" pitchFamily="18" charset="0"/>
-                <a:hlinkClick r:id="rId3" action="ppaction://hlinksldjump"/>
-              </a:rPr>
-              <a:t>[1]</a:t>
-            </a:r>
             <a:endParaRPr lang="en-IN" dirty="0">
               <a:latin typeface="Times New Roman" panose="02020603050405020304" pitchFamily="18" charset="0"/>
               <a:cs typeface="Times New Roman" panose="02020603050405020304" pitchFamily="18" charset="0"/>
             </a:endParaRPr>
           </a:p>
           <a:p>
-            <a:r>
-              <a:rPr lang="en-IN" dirty="0">
-                <a:latin typeface="Times New Roman" panose="02020603050405020304" pitchFamily="18" charset="0"/>
-                <a:cs typeface="Times New Roman" panose="02020603050405020304" pitchFamily="18" charset="0"/>
-              </a:rPr>
-              <a:t>The Network Compute Bridge service provides capabilities to perform off-board computation. </a:t>
-            </a:r>
-            <a:r>
-              <a:rPr lang="en-IN" dirty="0">
-                <a:latin typeface="Times New Roman" panose="02020603050405020304" pitchFamily="18" charset="0"/>
-                <a:cs typeface="Times New Roman" panose="02020603050405020304" pitchFamily="18" charset="0"/>
-                <a:hlinkClick r:id="rId3" action="ppaction://hlinksldjump"/>
-              </a:rPr>
-              <a:t>[1]</a:t>
-            </a:r>
             <a:endParaRPr lang="en-IN" dirty="0">
               <a:latin typeface="Times New Roman" panose="02020603050405020304" pitchFamily="18" charset="0"/>
               <a:cs typeface="Times New Roman" panose="02020603050405020304" pitchFamily="18" charset="0"/>
             </a:endParaRPr>
           </a:p>
-          <a:p>
-            <a:endParaRPr lang="en-IN" dirty="0">
-              <a:latin typeface="Times New Roman" panose="02020603050405020304" pitchFamily="18" charset="0"/>
-              <a:cs typeface="Times New Roman" panose="02020603050405020304" pitchFamily="18" charset="0"/>
-            </a:endParaRPr>
-          </a:p>
         </p:txBody>
       </p:sp>
       <p:sp>
@@ -4481,9 +4718,10 @@
           <a:lstStyle/>
           <a:p>
             <a:r>
-              <a:rPr lang="de-DE"/>
-              <a:t>26.05.2025</a:t>
-            </a:r>
+              <a:rPr lang="en-US"/>
+              <a:t>05.06.2025</a:t>
+            </a:r>
+            <a:endParaRPr lang="de-DE"/>
           </a:p>
         </p:txBody>
       </p:sp>
@@ -4548,7 +4786,7 @@
     </p:spTree>
     <p:extLst>
       <p:ext uri="{BB962C8B-B14F-4D97-AF65-F5344CB8AC3E}">
-        <p14:creationId xmlns:p14="http://schemas.microsoft.com/office/powerpoint/2010/main" val="1083630907"/>
+        <p14:creationId xmlns:p14="http://schemas.microsoft.com/office/powerpoint/2010/main" val="3070742482"/>
       </p:ext>
     </p:extLst>
   </p:cSld>
@@ -4580,7 +4818,7 @@
           <p:cNvPr id="2" name="Title 1">
             <a:extLst>
               <a:ext uri="{FF2B5EF4-FFF2-40B4-BE49-F238E27FC236}">
-                <a16:creationId xmlns:a16="http://schemas.microsoft.com/office/drawing/2014/main" id="{7AC46FCE-F9C7-6EBA-A389-8EFFE9785899}"/>
+                <a16:creationId xmlns:a16="http://schemas.microsoft.com/office/drawing/2014/main" id="{DEF267D6-2E50-9C27-60E9-67AD400B5064}"/>
               </a:ext>
             </a:extLst>
           </p:cNvPr>
@@ -4596,64 +4834,63 @@
           <a:bodyPr/>
           <a:lstStyle/>
           <a:p>
-            <a:r>
-              <a:rPr lang="en-IN" dirty="0"/>
-              <a:t>References:</a:t>
-            </a:r>
-          </a:p>
-        </p:txBody>
-      </p:sp>
-      <p:sp>
-        <p:nvSpPr>
-          <p:cNvPr id="3" name="Content Placeholder 2">
-            <a:extLst>
-              <a:ext uri="{FF2B5EF4-FFF2-40B4-BE49-F238E27FC236}">
-                <a16:creationId xmlns:a16="http://schemas.microsoft.com/office/drawing/2014/main" id="{21089575-3086-3FC5-A09E-F496391BB820}"/>
-              </a:ext>
-            </a:extLst>
-          </p:cNvPr>
-          <p:cNvSpPr>
-            <a:spLocks noGrp="1"/>
-          </p:cNvSpPr>
-          <p:nvPr>
-            <p:ph idx="1"/>
-          </p:nvPr>
-        </p:nvSpPr>
-        <p:spPr/>
-        <p:txBody>
-          <a:bodyPr/>
-          <a:lstStyle/>
-          <a:p>
-            <a:r>
-              <a:rPr lang="en-IN" dirty="0"/>
-              <a:t>SPOT SDK – SPOT documentation </a:t>
-            </a:r>
+            <a:pPr algn="ctr"/>
             <a:r>
               <a:rPr lang="en-IN" dirty="0">
+                <a:latin typeface="Times New Roman" panose="02020603050405020304" pitchFamily="18" charset="0"/>
+                <a:cs typeface="Times New Roman" panose="02020603050405020304" pitchFamily="18" charset="0"/>
                 <a:hlinkClick r:id="rId2"/>
               </a:rPr>
-              <a:t>https://dev.bostondynamics.com/readme</a:t>
-            </a:r>
-            <a:r>
-              <a:rPr lang="en-IN" dirty="0"/>
-              <a:t> [1]</a:t>
-            </a:r>
-          </a:p>
-          <a:p>
-            <a:pPr marL="514350" indent="-514350">
-              <a:buFont typeface="+mj-lt"/>
-              <a:buAutoNum type="arabicPeriod"/>
-            </a:pPr>
-            <a:endParaRPr lang="en-IN" dirty="0"/>
-          </a:p>
-        </p:txBody>
-      </p:sp>
+              <a:t>RPC (Remote Procedure Call)</a:t>
+            </a:r>
+            <a:endParaRPr lang="en-IN" dirty="0">
+              <a:latin typeface="Times New Roman" panose="02020603050405020304" pitchFamily="18" charset="0"/>
+              <a:cs typeface="Times New Roman" panose="02020603050405020304" pitchFamily="18" charset="0"/>
+            </a:endParaRPr>
+          </a:p>
+        </p:txBody>
+      </p:sp>
+      <p:pic>
+        <p:nvPicPr>
+          <p:cNvPr id="10" name="Content Placeholder 9">
+            <a:hlinkClick r:id="rId3" action="ppaction://hlinksldjump"/>
+            <a:extLst>
+              <a:ext uri="{FF2B5EF4-FFF2-40B4-BE49-F238E27FC236}">
+                <a16:creationId xmlns:a16="http://schemas.microsoft.com/office/drawing/2014/main" id="{CF4847C5-CEBD-EF31-E54F-432F9BB97D3C}"/>
+              </a:ext>
+            </a:extLst>
+          </p:cNvPr>
+          <p:cNvPicPr>
+            <a:picLocks noGrp="1" noChangeAspect="1"/>
+          </p:cNvPicPr>
+          <p:nvPr>
+            <p:ph idx="1"/>
+          </p:nvPr>
+        </p:nvPicPr>
+        <p:blipFill>
+          <a:blip r:embed="rId4">
+            <a:extLst>
+              <a:ext uri="{96DAC541-7B7A-43D3-8B79-37D633B846F1}">
+                <asvg:svgBlip xmlns:asvg="http://schemas.microsoft.com/office/drawing/2016/SVG/main" r:embed="rId5"/>
+              </a:ext>
+            </a:extLst>
+          </a:blip>
+          <a:srcRect/>
+          <a:stretch/>
+        </p:blipFill>
+        <p:spPr>
+          <a:xfrm>
+            <a:off x="2233399" y="1690688"/>
+            <a:ext cx="7753350" cy="4665662"/>
+          </a:xfrm>
+        </p:spPr>
+      </p:pic>
       <p:sp>
         <p:nvSpPr>
           <p:cNvPr id="4" name="Date Placeholder 3">
             <a:extLst>
               <a:ext uri="{FF2B5EF4-FFF2-40B4-BE49-F238E27FC236}">
-                <a16:creationId xmlns:a16="http://schemas.microsoft.com/office/drawing/2014/main" id="{08B8AE87-AB29-4511-9939-306A476605B2}"/>
+                <a16:creationId xmlns:a16="http://schemas.microsoft.com/office/drawing/2014/main" id="{42B5D580-9028-99B4-E463-C0142B7E3ABC}"/>
               </a:ext>
             </a:extLst>
           </p:cNvPr>
@@ -4670,9 +4907,10 @@
           <a:lstStyle/>
           <a:p>
             <a:r>
-              <a:rPr lang="de-DE"/>
-              <a:t>26.05.2025</a:t>
-            </a:r>
+              <a:rPr lang="en-US"/>
+              <a:t>05.06.2025</a:t>
+            </a:r>
+            <a:endParaRPr lang="de-DE"/>
           </a:p>
         </p:txBody>
       </p:sp>
@@ -4681,7 +4919,7 @@
           <p:cNvPr id="5" name="Footer Placeholder 4">
             <a:extLst>
               <a:ext uri="{FF2B5EF4-FFF2-40B4-BE49-F238E27FC236}">
-                <a16:creationId xmlns:a16="http://schemas.microsoft.com/office/drawing/2014/main" id="{32F2723D-598D-397A-21C9-E4062196A04F}"/>
+                <a16:creationId xmlns:a16="http://schemas.microsoft.com/office/drawing/2014/main" id="{856F1670-9E32-AB37-4942-3274BCC3D0D0}"/>
               </a:ext>
             </a:extLst>
           </p:cNvPr>
@@ -4710,7 +4948,7 @@
           <p:cNvPr id="6" name="Slide Number Placeholder 5">
             <a:extLst>
               <a:ext uri="{FF2B5EF4-FFF2-40B4-BE49-F238E27FC236}">
-                <a16:creationId xmlns:a16="http://schemas.microsoft.com/office/drawing/2014/main" id="{E84B2434-079F-4CFE-EFF5-2FDBC0D37C5F}"/>
+                <a16:creationId xmlns:a16="http://schemas.microsoft.com/office/drawing/2014/main" id="{E0DDE311-F27F-F537-94EA-6E603010ADA5}"/>
               </a:ext>
             </a:extLst>
           </p:cNvPr>
@@ -4737,7 +4975,1136 @@
     </p:spTree>
     <p:extLst>
       <p:ext uri="{BB962C8B-B14F-4D97-AF65-F5344CB8AC3E}">
-        <p14:creationId xmlns:p14="http://schemas.microsoft.com/office/powerpoint/2010/main" val="1051072451"/>
+        <p14:creationId xmlns:p14="http://schemas.microsoft.com/office/powerpoint/2010/main" val="4158956480"/>
+      </p:ext>
+    </p:extLst>
+  </p:cSld>
+  <p:clrMapOvr>
+    <a:masterClrMapping/>
+  </p:clrMapOvr>
+</p:sld>
+</file>
+
+<file path=ppt/slides/slide5.xml><?xml version="1.0" encoding="utf-8"?>
+<p:sld xmlns:a="http://schemas.openxmlformats.org/drawingml/2006/main" xmlns:r="http://schemas.openxmlformats.org/officeDocument/2006/relationships" xmlns:p="http://schemas.openxmlformats.org/presentationml/2006/main">
+  <p:cSld>
+    <p:spTree>
+      <p:nvGrpSpPr>
+        <p:cNvPr id="1" name=""/>
+        <p:cNvGrpSpPr/>
+        <p:nvPr/>
+      </p:nvGrpSpPr>
+      <p:grpSpPr>
+        <a:xfrm>
+          <a:off x="0" y="0"/>
+          <a:ext cx="0" cy="0"/>
+          <a:chOff x="0" y="0"/>
+          <a:chExt cx="0" cy="0"/>
+        </a:xfrm>
+      </p:grpSpPr>
+      <p:sp>
+        <p:nvSpPr>
+          <p:cNvPr id="2" name="Title 1">
+            <a:extLst>
+              <a:ext uri="{FF2B5EF4-FFF2-40B4-BE49-F238E27FC236}">
+                <a16:creationId xmlns:a16="http://schemas.microsoft.com/office/drawing/2014/main" id="{DEF267D6-2E50-9C27-60E9-67AD400B5064}"/>
+              </a:ext>
+            </a:extLst>
+          </p:cNvPr>
+          <p:cNvSpPr>
+            <a:spLocks noGrp="1"/>
+          </p:cNvSpPr>
+          <p:nvPr>
+            <p:ph type="title"/>
+          </p:nvPr>
+        </p:nvSpPr>
+        <p:spPr/>
+        <p:txBody>
+          <a:bodyPr/>
+          <a:lstStyle/>
+          <a:p>
+            <a:pPr algn="ctr"/>
+            <a:r>
+              <a:rPr lang="en-IN" dirty="0">
+                <a:latin typeface="Times New Roman" panose="02020603050405020304" pitchFamily="18" charset="0"/>
+                <a:cs typeface="Times New Roman" panose="02020603050405020304" pitchFamily="18" charset="0"/>
+                <a:hlinkClick r:id="rId2"/>
+              </a:rPr>
+              <a:t>gRPC Service definition</a:t>
+            </a:r>
+            <a:r>
+              <a:rPr lang="en-IN" baseline="-25000" dirty="0">
+                <a:latin typeface="Times New Roman" panose="02020603050405020304" pitchFamily="18" charset="0"/>
+                <a:cs typeface="Times New Roman" panose="02020603050405020304" pitchFamily="18" charset="0"/>
+                <a:hlinkClick r:id="rId3" action="ppaction://hlinksldjump"/>
+              </a:rPr>
+              <a:t>[4]</a:t>
+            </a:r>
+            <a:endParaRPr lang="en-IN" dirty="0">
+              <a:latin typeface="Times New Roman" panose="02020603050405020304" pitchFamily="18" charset="0"/>
+              <a:cs typeface="Times New Roman" panose="02020603050405020304" pitchFamily="18" charset="0"/>
+            </a:endParaRPr>
+          </a:p>
+        </p:txBody>
+      </p:sp>
+      <p:sp>
+        <p:nvSpPr>
+          <p:cNvPr id="3" name="Content Placeholder 2">
+            <a:extLst>
+              <a:ext uri="{FF2B5EF4-FFF2-40B4-BE49-F238E27FC236}">
+                <a16:creationId xmlns:a16="http://schemas.microsoft.com/office/drawing/2014/main" id="{89DEB8F0-937E-69A5-7A1A-CEC12D0B0060}"/>
+              </a:ext>
+            </a:extLst>
+          </p:cNvPr>
+          <p:cNvSpPr>
+            <a:spLocks noGrp="1"/>
+          </p:cNvSpPr>
+          <p:nvPr>
+            <p:ph idx="1"/>
+          </p:nvPr>
+        </p:nvSpPr>
+        <p:spPr/>
+        <p:txBody>
+          <a:bodyPr>
+            <a:normAutofit fontScale="85000" lnSpcReduction="10000"/>
+          </a:bodyPr>
+          <a:lstStyle/>
+          <a:p>
+            <a:r>
+              <a:rPr lang="en-IN" dirty="0">
+                <a:latin typeface="Times New Roman" panose="02020603050405020304" pitchFamily="18" charset="0"/>
+                <a:cs typeface="Times New Roman" panose="02020603050405020304" pitchFamily="18" charset="0"/>
+              </a:rPr>
+              <a:t>gRPC has four kinds of service methods:</a:t>
+            </a:r>
+          </a:p>
+          <a:p>
+            <a:pPr lvl="1"/>
+            <a:r>
+              <a:rPr lang="en-IN" dirty="0">
+                <a:latin typeface="Times New Roman" panose="02020603050405020304" pitchFamily="18" charset="0"/>
+                <a:cs typeface="Times New Roman" panose="02020603050405020304" pitchFamily="18" charset="0"/>
+              </a:rPr>
+              <a:t>Unary RPCs where the client sends a single request to the server and gets a single response back, just like a normal function call.</a:t>
+            </a:r>
+          </a:p>
+          <a:p>
+            <a:pPr lvl="1"/>
+            <a:r>
+              <a:rPr lang="en-IN" dirty="0">
+                <a:latin typeface="Times New Roman" panose="02020603050405020304" pitchFamily="18" charset="0"/>
+                <a:cs typeface="Times New Roman" panose="02020603050405020304" pitchFamily="18" charset="0"/>
+              </a:rPr>
+              <a:t>Server streaming RPCs where the client sends a request to the server and gets a stream to read a sequence of messages back. The client reads from the returned stream until there are no more messages. gRPC guarantees message ordering within an individual RPC call.</a:t>
+            </a:r>
+          </a:p>
+          <a:p>
+            <a:pPr lvl="1"/>
+            <a:r>
+              <a:rPr lang="en-IN" dirty="0">
+                <a:latin typeface="Times New Roman" panose="02020603050405020304" pitchFamily="18" charset="0"/>
+                <a:cs typeface="Times New Roman" panose="02020603050405020304" pitchFamily="18" charset="0"/>
+              </a:rPr>
+              <a:t>Client streaming RPCs where the client writes a sequence of messages and sends them to the server, again using a provided stream. Once the client has finished writing the messages, it waits for the server to read them and return its response. Again gRPC guarantees message ordering within an individual RPC call.</a:t>
+            </a:r>
+          </a:p>
+          <a:p>
+            <a:pPr lvl="1"/>
+            <a:r>
+              <a:rPr lang="en-IN" dirty="0">
+                <a:latin typeface="Times New Roman" panose="02020603050405020304" pitchFamily="18" charset="0"/>
+                <a:cs typeface="Times New Roman" panose="02020603050405020304" pitchFamily="18" charset="0"/>
+              </a:rPr>
+              <a:t>Bidirectional streaming RPCs where both sides send a sequence of messages using a read-write stream. The two streams operate independently, so clients and servers can read and write in whatever order they like: for example, the server could wait to receive all the client messages before writing its responses, or it could alternately read a message then write a message, or some other combination of reads and writes. The order of messages in each stream is preserved.</a:t>
+            </a:r>
+          </a:p>
+          <a:p>
+            <a:endParaRPr lang="en-IN" dirty="0">
+              <a:latin typeface="Times New Roman" panose="02020603050405020304" pitchFamily="18" charset="0"/>
+              <a:cs typeface="Times New Roman" panose="02020603050405020304" pitchFamily="18" charset="0"/>
+            </a:endParaRPr>
+          </a:p>
+          <a:p>
+            <a:endParaRPr lang="en-IN" dirty="0">
+              <a:latin typeface="Times New Roman" panose="02020603050405020304" pitchFamily="18" charset="0"/>
+              <a:cs typeface="Times New Roman" panose="02020603050405020304" pitchFamily="18" charset="0"/>
+            </a:endParaRPr>
+          </a:p>
+          <a:p>
+            <a:endParaRPr lang="en-IN" dirty="0">
+              <a:latin typeface="Times New Roman" panose="02020603050405020304" pitchFamily="18" charset="0"/>
+              <a:cs typeface="Times New Roman" panose="02020603050405020304" pitchFamily="18" charset="0"/>
+            </a:endParaRPr>
+          </a:p>
+        </p:txBody>
+      </p:sp>
+      <p:sp>
+        <p:nvSpPr>
+          <p:cNvPr id="4" name="Date Placeholder 3">
+            <a:extLst>
+              <a:ext uri="{FF2B5EF4-FFF2-40B4-BE49-F238E27FC236}">
+                <a16:creationId xmlns:a16="http://schemas.microsoft.com/office/drawing/2014/main" id="{42B5D580-9028-99B4-E463-C0142B7E3ABC}"/>
+              </a:ext>
+            </a:extLst>
+          </p:cNvPr>
+          <p:cNvSpPr>
+            <a:spLocks noGrp="1"/>
+          </p:cNvSpPr>
+          <p:nvPr>
+            <p:ph type="dt" sz="half" idx="10"/>
+          </p:nvPr>
+        </p:nvSpPr>
+        <p:spPr/>
+        <p:txBody>
+          <a:bodyPr/>
+          <a:lstStyle/>
+          <a:p>
+            <a:r>
+              <a:rPr lang="en-US"/>
+              <a:t>05.06.2025</a:t>
+            </a:r>
+            <a:endParaRPr lang="de-DE"/>
+          </a:p>
+        </p:txBody>
+      </p:sp>
+      <p:sp>
+        <p:nvSpPr>
+          <p:cNvPr id="5" name="Footer Placeholder 4">
+            <a:extLst>
+              <a:ext uri="{FF2B5EF4-FFF2-40B4-BE49-F238E27FC236}">
+                <a16:creationId xmlns:a16="http://schemas.microsoft.com/office/drawing/2014/main" id="{856F1670-9E32-AB37-4942-3274BCC3D0D0}"/>
+              </a:ext>
+            </a:extLst>
+          </p:cNvPr>
+          <p:cNvSpPr>
+            <a:spLocks noGrp="1"/>
+          </p:cNvSpPr>
+          <p:nvPr>
+            <p:ph type="ftr" sz="quarter" idx="11"/>
+          </p:nvPr>
+        </p:nvSpPr>
+        <p:spPr/>
+        <p:txBody>
+          <a:bodyPr/>
+          <a:lstStyle/>
+          <a:p>
+            <a:r>
+              <a:rPr lang="en-IN"/>
+              <a:t>IDT projects | GDSPOT | SoSe 2025</a:t>
+            </a:r>
+            <a:endParaRPr lang="de-DE"/>
+          </a:p>
+        </p:txBody>
+      </p:sp>
+      <p:sp>
+        <p:nvSpPr>
+          <p:cNvPr id="6" name="Slide Number Placeholder 5">
+            <a:extLst>
+              <a:ext uri="{FF2B5EF4-FFF2-40B4-BE49-F238E27FC236}">
+                <a16:creationId xmlns:a16="http://schemas.microsoft.com/office/drawing/2014/main" id="{E0DDE311-F27F-F537-94EA-6E603010ADA5}"/>
+              </a:ext>
+            </a:extLst>
+          </p:cNvPr>
+          <p:cNvSpPr>
+            <a:spLocks noGrp="1"/>
+          </p:cNvSpPr>
+          <p:nvPr>
+            <p:ph type="sldNum" sz="quarter" idx="12"/>
+          </p:nvPr>
+        </p:nvSpPr>
+        <p:spPr/>
+        <p:txBody>
+          <a:bodyPr/>
+          <a:lstStyle/>
+          <a:p>
+            <a:fld id="{516988D0-1470-4690-BDE1-E3A50181EF78}" type="slidenum">
+              <a:rPr lang="de-DE" smtClean="0"/>
+              <a:t>5</a:t>
+            </a:fld>
+            <a:endParaRPr lang="de-DE" dirty="0"/>
+          </a:p>
+        </p:txBody>
+      </p:sp>
+    </p:spTree>
+    <p:extLst>
+      <p:ext uri="{BB962C8B-B14F-4D97-AF65-F5344CB8AC3E}">
+        <p14:creationId xmlns:p14="http://schemas.microsoft.com/office/powerpoint/2010/main" val="1337542085"/>
+      </p:ext>
+    </p:extLst>
+  </p:cSld>
+  <p:clrMapOvr>
+    <a:masterClrMapping/>
+  </p:clrMapOvr>
+</p:sld>
+</file>
+
+<file path=ppt/slides/slide6.xml><?xml version="1.0" encoding="utf-8"?>
+<p:sld xmlns:a="http://schemas.openxmlformats.org/drawingml/2006/main" xmlns:r="http://schemas.openxmlformats.org/officeDocument/2006/relationships" xmlns:p="http://schemas.openxmlformats.org/presentationml/2006/main">
+  <p:cSld>
+    <p:spTree>
+      <p:nvGrpSpPr>
+        <p:cNvPr id="1" name=""/>
+        <p:cNvGrpSpPr/>
+        <p:nvPr/>
+      </p:nvGrpSpPr>
+      <p:grpSpPr>
+        <a:xfrm>
+          <a:off x="0" y="0"/>
+          <a:ext cx="0" cy="0"/>
+          <a:chOff x="0" y="0"/>
+          <a:chExt cx="0" cy="0"/>
+        </a:xfrm>
+      </p:grpSpPr>
+      <p:sp>
+        <p:nvSpPr>
+          <p:cNvPr id="2" name="Title 1">
+            <a:extLst>
+              <a:ext uri="{FF2B5EF4-FFF2-40B4-BE49-F238E27FC236}">
+                <a16:creationId xmlns:a16="http://schemas.microsoft.com/office/drawing/2014/main" id="{DEF267D6-2E50-9C27-60E9-67AD400B5064}"/>
+              </a:ext>
+            </a:extLst>
+          </p:cNvPr>
+          <p:cNvSpPr>
+            <a:spLocks noGrp="1"/>
+          </p:cNvSpPr>
+          <p:nvPr>
+            <p:ph type="title"/>
+          </p:nvPr>
+        </p:nvSpPr>
+        <p:spPr/>
+        <p:txBody>
+          <a:bodyPr/>
+          <a:lstStyle/>
+          <a:p>
+            <a:pPr algn="ctr"/>
+            <a:r>
+              <a:rPr lang="en-IN" dirty="0">
+                <a:latin typeface="Times New Roman" panose="02020603050405020304" pitchFamily="18" charset="0"/>
+                <a:cs typeface="Times New Roman" panose="02020603050405020304" pitchFamily="18" charset="0"/>
+              </a:rPr>
+              <a:t>Basic Programme</a:t>
+            </a:r>
+          </a:p>
+        </p:txBody>
+      </p:sp>
+      <p:sp>
+        <p:nvSpPr>
+          <p:cNvPr id="4" name="Date Placeholder 3">
+            <a:extLst>
+              <a:ext uri="{FF2B5EF4-FFF2-40B4-BE49-F238E27FC236}">
+                <a16:creationId xmlns:a16="http://schemas.microsoft.com/office/drawing/2014/main" id="{42B5D580-9028-99B4-E463-C0142B7E3ABC}"/>
+              </a:ext>
+            </a:extLst>
+          </p:cNvPr>
+          <p:cNvSpPr>
+            <a:spLocks noGrp="1"/>
+          </p:cNvSpPr>
+          <p:nvPr>
+            <p:ph type="dt" sz="half" idx="10"/>
+          </p:nvPr>
+        </p:nvSpPr>
+        <p:spPr/>
+        <p:txBody>
+          <a:bodyPr/>
+          <a:lstStyle/>
+          <a:p>
+            <a:r>
+              <a:rPr lang="en-US"/>
+              <a:t>05.06.2025</a:t>
+            </a:r>
+            <a:endParaRPr lang="de-DE"/>
+          </a:p>
+        </p:txBody>
+      </p:sp>
+      <p:sp>
+        <p:nvSpPr>
+          <p:cNvPr id="5" name="Footer Placeholder 4">
+            <a:extLst>
+              <a:ext uri="{FF2B5EF4-FFF2-40B4-BE49-F238E27FC236}">
+                <a16:creationId xmlns:a16="http://schemas.microsoft.com/office/drawing/2014/main" id="{856F1670-9E32-AB37-4942-3274BCC3D0D0}"/>
+              </a:ext>
+            </a:extLst>
+          </p:cNvPr>
+          <p:cNvSpPr>
+            <a:spLocks noGrp="1"/>
+          </p:cNvSpPr>
+          <p:nvPr>
+            <p:ph type="ftr" sz="quarter" idx="11"/>
+          </p:nvPr>
+        </p:nvSpPr>
+        <p:spPr/>
+        <p:txBody>
+          <a:bodyPr/>
+          <a:lstStyle/>
+          <a:p>
+            <a:r>
+              <a:rPr lang="en-IN"/>
+              <a:t>IDT projects | GDSPOT | SoSe 2025</a:t>
+            </a:r>
+            <a:endParaRPr lang="de-DE"/>
+          </a:p>
+        </p:txBody>
+      </p:sp>
+      <p:sp>
+        <p:nvSpPr>
+          <p:cNvPr id="6" name="Slide Number Placeholder 5">
+            <a:extLst>
+              <a:ext uri="{FF2B5EF4-FFF2-40B4-BE49-F238E27FC236}">
+                <a16:creationId xmlns:a16="http://schemas.microsoft.com/office/drawing/2014/main" id="{E0DDE311-F27F-F537-94EA-6E603010ADA5}"/>
+              </a:ext>
+            </a:extLst>
+          </p:cNvPr>
+          <p:cNvSpPr>
+            <a:spLocks noGrp="1"/>
+          </p:cNvSpPr>
+          <p:nvPr>
+            <p:ph type="sldNum" sz="quarter" idx="12"/>
+          </p:nvPr>
+        </p:nvSpPr>
+        <p:spPr/>
+        <p:txBody>
+          <a:bodyPr/>
+          <a:lstStyle/>
+          <a:p>
+            <a:fld id="{516988D0-1470-4690-BDE1-E3A50181EF78}" type="slidenum">
+              <a:rPr lang="de-DE" smtClean="0"/>
+              <a:t>6</a:t>
+            </a:fld>
+            <a:endParaRPr lang="de-DE" dirty="0"/>
+          </a:p>
+        </p:txBody>
+      </p:sp>
+      <p:pic>
+        <p:nvPicPr>
+          <p:cNvPr id="1026" name="Picture 2" descr="Generated image">
+            <a:extLst>
+              <a:ext uri="{FF2B5EF4-FFF2-40B4-BE49-F238E27FC236}">
+                <a16:creationId xmlns:a16="http://schemas.microsoft.com/office/drawing/2014/main" id="{1DC6B9E6-4F90-D60F-6C01-696225C8E45B}"/>
+              </a:ext>
+            </a:extLst>
+          </p:cNvPr>
+          <p:cNvPicPr>
+            <a:picLocks noGrp="1" noChangeAspect="1" noChangeArrowheads="1"/>
+          </p:cNvPicPr>
+          <p:nvPr>
+            <p:ph idx="1"/>
+          </p:nvPr>
+        </p:nvPicPr>
+        <p:blipFill>
+          <a:blip r:embed="rId2">
+            <a:extLst>
+              <a:ext uri="{28A0092B-C50C-407E-A947-70E740481C1C}">
+                <a14:useLocalDpi xmlns:a14="http://schemas.microsoft.com/office/drawing/2010/main" val="0"/>
+              </a:ext>
+            </a:extLst>
+          </a:blip>
+          <a:srcRect/>
+          <a:stretch>
+            <a:fillRect/>
+          </a:stretch>
+        </p:blipFill>
+        <p:spPr bwMode="auto">
+          <a:xfrm>
+            <a:off x="3920331" y="1690688"/>
+            <a:ext cx="4351338" cy="4351338"/>
+          </a:xfrm>
+          <a:prstGeom prst="rect">
+            <a:avLst/>
+          </a:prstGeom>
+          <a:noFill/>
+          <a:extLst>
+            <a:ext uri="{909E8E84-426E-40DD-AFC4-6F175D3DCCD1}">
+              <a14:hiddenFill xmlns:a14="http://schemas.microsoft.com/office/drawing/2010/main">
+                <a:solidFill>
+                  <a:srgbClr val="FFFFFF"/>
+                </a:solidFill>
+              </a14:hiddenFill>
+            </a:ext>
+          </a:extLst>
+        </p:spPr>
+      </p:pic>
+    </p:spTree>
+    <p:extLst>
+      <p:ext uri="{BB962C8B-B14F-4D97-AF65-F5344CB8AC3E}">
+        <p14:creationId xmlns:p14="http://schemas.microsoft.com/office/powerpoint/2010/main" val="541089109"/>
+      </p:ext>
+    </p:extLst>
+  </p:cSld>
+  <p:clrMapOvr>
+    <a:masterClrMapping/>
+  </p:clrMapOvr>
+</p:sld>
+</file>
+
+<file path=ppt/slides/slide7.xml><?xml version="1.0" encoding="utf-8"?>
+<p:sld xmlns:a="http://schemas.openxmlformats.org/drawingml/2006/main" xmlns:r="http://schemas.openxmlformats.org/officeDocument/2006/relationships" xmlns:p="http://schemas.openxmlformats.org/presentationml/2006/main">
+  <p:cSld>
+    <p:spTree>
+      <p:nvGrpSpPr>
+        <p:cNvPr id="1" name=""/>
+        <p:cNvGrpSpPr/>
+        <p:nvPr/>
+      </p:nvGrpSpPr>
+      <p:grpSpPr>
+        <a:xfrm>
+          <a:off x="0" y="0"/>
+          <a:ext cx="0" cy="0"/>
+          <a:chOff x="0" y="0"/>
+          <a:chExt cx="0" cy="0"/>
+        </a:xfrm>
+      </p:grpSpPr>
+      <p:sp>
+        <p:nvSpPr>
+          <p:cNvPr id="2" name="Title 1">
+            <a:extLst>
+              <a:ext uri="{FF2B5EF4-FFF2-40B4-BE49-F238E27FC236}">
+                <a16:creationId xmlns:a16="http://schemas.microsoft.com/office/drawing/2014/main" id="{DEF267D6-2E50-9C27-60E9-67AD400B5064}"/>
+              </a:ext>
+            </a:extLst>
+          </p:cNvPr>
+          <p:cNvSpPr>
+            <a:spLocks noGrp="1"/>
+          </p:cNvSpPr>
+          <p:nvPr>
+            <p:ph type="title"/>
+          </p:nvPr>
+        </p:nvSpPr>
+        <p:spPr/>
+        <p:txBody>
+          <a:bodyPr/>
+          <a:lstStyle/>
+          <a:p>
+            <a:pPr algn="ctr"/>
+            <a:r>
+              <a:rPr lang="en-IN" dirty="0">
+                <a:latin typeface="Times New Roman" panose="02020603050405020304" pitchFamily="18" charset="0"/>
+                <a:cs typeface="Times New Roman" panose="02020603050405020304" pitchFamily="18" charset="0"/>
+                <a:hlinkClick r:id="rId2"/>
+              </a:rPr>
+              <a:t>Robot services</a:t>
+            </a:r>
+            <a:r>
+              <a:rPr lang="en-IN" baseline="-25000" dirty="0">
+                <a:latin typeface="Times New Roman" panose="02020603050405020304" pitchFamily="18" charset="0"/>
+                <a:cs typeface="Times New Roman" panose="02020603050405020304" pitchFamily="18" charset="0"/>
+                <a:hlinkClick r:id="rId3" action="ppaction://hlinksldjump"/>
+              </a:rPr>
+              <a:t>[1]</a:t>
+            </a:r>
+            <a:endParaRPr lang="en-IN" dirty="0">
+              <a:latin typeface="Times New Roman" panose="02020603050405020304" pitchFamily="18" charset="0"/>
+              <a:cs typeface="Times New Roman" panose="02020603050405020304" pitchFamily="18" charset="0"/>
+            </a:endParaRPr>
+          </a:p>
+        </p:txBody>
+      </p:sp>
+      <p:sp>
+        <p:nvSpPr>
+          <p:cNvPr id="3" name="Content Placeholder 2">
+            <a:extLst>
+              <a:ext uri="{FF2B5EF4-FFF2-40B4-BE49-F238E27FC236}">
+                <a16:creationId xmlns:a16="http://schemas.microsoft.com/office/drawing/2014/main" id="{89DEB8F0-937E-69A5-7A1A-CEC12D0B0060}"/>
+              </a:ext>
+            </a:extLst>
+          </p:cNvPr>
+          <p:cNvSpPr>
+            <a:spLocks noGrp="1"/>
+          </p:cNvSpPr>
+          <p:nvPr>
+            <p:ph idx="1"/>
+          </p:nvPr>
+        </p:nvSpPr>
+        <p:spPr/>
+        <p:txBody>
+          <a:bodyPr>
+            <a:normAutofit/>
+          </a:bodyPr>
+          <a:lstStyle/>
+          <a:p>
+            <a:r>
+              <a:rPr lang="en-IN" dirty="0">
+                <a:latin typeface="Times New Roman" panose="02020603050405020304" pitchFamily="18" charset="0"/>
+                <a:cs typeface="Times New Roman" panose="02020603050405020304" pitchFamily="18" charset="0"/>
+              </a:rPr>
+              <a:t>gRPC specifies the service interfaces and remote procedure calls (RPCs) supported by the service. For example, the Spot API has an authentication service to check the passed in username and password and returns a session token if they are valid.</a:t>
+            </a:r>
+            <a:r>
+              <a:rPr lang="en-IN" baseline="-25000" dirty="0">
+                <a:latin typeface="Times New Roman" panose="02020603050405020304" pitchFamily="18" charset="0"/>
+                <a:cs typeface="Times New Roman" panose="02020603050405020304" pitchFamily="18" charset="0"/>
+                <a:hlinkClick r:id="rId3" action="ppaction://hlinksldjump"/>
+              </a:rPr>
+              <a:t>[2]</a:t>
+            </a:r>
+            <a:endParaRPr lang="en-IN" dirty="0">
+              <a:latin typeface="Times New Roman" panose="02020603050405020304" pitchFamily="18" charset="0"/>
+              <a:cs typeface="Times New Roman" panose="02020603050405020304" pitchFamily="18" charset="0"/>
+            </a:endParaRPr>
+          </a:p>
+          <a:p>
+            <a:r>
+              <a:rPr lang="en-IN" dirty="0">
+                <a:latin typeface="Times New Roman" panose="02020603050405020304" pitchFamily="18" charset="0"/>
+                <a:cs typeface="Times New Roman" panose="02020603050405020304" pitchFamily="18" charset="0"/>
+              </a:rPr>
+              <a:t>Services used in the basic program:</a:t>
+            </a:r>
+          </a:p>
+          <a:p>
+            <a:pPr lvl="1"/>
+            <a:r>
+              <a:rPr lang="en-IN" dirty="0">
+                <a:latin typeface="Times New Roman" panose="02020603050405020304" pitchFamily="18" charset="0"/>
+                <a:cs typeface="Times New Roman" panose="02020603050405020304" pitchFamily="18" charset="0"/>
+              </a:rPr>
+              <a:t>Base services: robot-id, auth, estop, time-sync, lease, robot state service, keep alive.</a:t>
+            </a:r>
+          </a:p>
+          <a:p>
+            <a:pPr lvl="1"/>
+            <a:r>
+              <a:rPr lang="en-IN" dirty="0">
+                <a:latin typeface="Times New Roman" panose="02020603050405020304" pitchFamily="18" charset="0"/>
+                <a:cs typeface="Times New Roman" panose="02020603050405020304" pitchFamily="18" charset="0"/>
+              </a:rPr>
+              <a:t>Other services: basic command (contains basic commands like sit or stand), image services.</a:t>
+            </a:r>
+          </a:p>
+        </p:txBody>
+      </p:sp>
+      <p:sp>
+        <p:nvSpPr>
+          <p:cNvPr id="4" name="Date Placeholder 3">
+            <a:extLst>
+              <a:ext uri="{FF2B5EF4-FFF2-40B4-BE49-F238E27FC236}">
+                <a16:creationId xmlns:a16="http://schemas.microsoft.com/office/drawing/2014/main" id="{42B5D580-9028-99B4-E463-C0142B7E3ABC}"/>
+              </a:ext>
+            </a:extLst>
+          </p:cNvPr>
+          <p:cNvSpPr>
+            <a:spLocks noGrp="1"/>
+          </p:cNvSpPr>
+          <p:nvPr>
+            <p:ph type="dt" sz="half" idx="10"/>
+          </p:nvPr>
+        </p:nvSpPr>
+        <p:spPr/>
+        <p:txBody>
+          <a:bodyPr/>
+          <a:lstStyle/>
+          <a:p>
+            <a:r>
+              <a:rPr lang="en-US"/>
+              <a:t>05.06.2025</a:t>
+            </a:r>
+            <a:endParaRPr lang="de-DE"/>
+          </a:p>
+        </p:txBody>
+      </p:sp>
+      <p:sp>
+        <p:nvSpPr>
+          <p:cNvPr id="5" name="Footer Placeholder 4">
+            <a:extLst>
+              <a:ext uri="{FF2B5EF4-FFF2-40B4-BE49-F238E27FC236}">
+                <a16:creationId xmlns:a16="http://schemas.microsoft.com/office/drawing/2014/main" id="{856F1670-9E32-AB37-4942-3274BCC3D0D0}"/>
+              </a:ext>
+            </a:extLst>
+          </p:cNvPr>
+          <p:cNvSpPr>
+            <a:spLocks noGrp="1"/>
+          </p:cNvSpPr>
+          <p:nvPr>
+            <p:ph type="ftr" sz="quarter" idx="11"/>
+          </p:nvPr>
+        </p:nvSpPr>
+        <p:spPr/>
+        <p:txBody>
+          <a:bodyPr/>
+          <a:lstStyle/>
+          <a:p>
+            <a:r>
+              <a:rPr lang="en-IN"/>
+              <a:t>IDT projects | GDSPOT | SoSe 2025</a:t>
+            </a:r>
+            <a:endParaRPr lang="de-DE"/>
+          </a:p>
+        </p:txBody>
+      </p:sp>
+      <p:sp>
+        <p:nvSpPr>
+          <p:cNvPr id="6" name="Slide Number Placeholder 5">
+            <a:extLst>
+              <a:ext uri="{FF2B5EF4-FFF2-40B4-BE49-F238E27FC236}">
+                <a16:creationId xmlns:a16="http://schemas.microsoft.com/office/drawing/2014/main" id="{E0DDE311-F27F-F537-94EA-6E603010ADA5}"/>
+              </a:ext>
+            </a:extLst>
+          </p:cNvPr>
+          <p:cNvSpPr>
+            <a:spLocks noGrp="1"/>
+          </p:cNvSpPr>
+          <p:nvPr>
+            <p:ph type="sldNum" sz="quarter" idx="12"/>
+          </p:nvPr>
+        </p:nvSpPr>
+        <p:spPr/>
+        <p:txBody>
+          <a:bodyPr/>
+          <a:lstStyle/>
+          <a:p>
+            <a:fld id="{516988D0-1470-4690-BDE1-E3A50181EF78}" type="slidenum">
+              <a:rPr lang="de-DE" smtClean="0"/>
+              <a:t>7</a:t>
+            </a:fld>
+            <a:endParaRPr lang="de-DE" dirty="0"/>
+          </a:p>
+        </p:txBody>
+      </p:sp>
+    </p:spTree>
+    <p:extLst>
+      <p:ext uri="{BB962C8B-B14F-4D97-AF65-F5344CB8AC3E}">
+        <p14:creationId xmlns:p14="http://schemas.microsoft.com/office/powerpoint/2010/main" val="1083630907"/>
+      </p:ext>
+    </p:extLst>
+  </p:cSld>
+  <p:clrMapOvr>
+    <a:masterClrMapping/>
+  </p:clrMapOvr>
+</p:sld>
+</file>
+
+<file path=ppt/slides/slide8.xml><?xml version="1.0" encoding="utf-8"?>
+<p:sld xmlns:a="http://schemas.openxmlformats.org/drawingml/2006/main" xmlns:r="http://schemas.openxmlformats.org/officeDocument/2006/relationships" xmlns:p="http://schemas.openxmlformats.org/presentationml/2006/main">
+  <p:cSld>
+    <p:spTree>
+      <p:nvGrpSpPr>
+        <p:cNvPr id="1" name=""/>
+        <p:cNvGrpSpPr/>
+        <p:nvPr/>
+      </p:nvGrpSpPr>
+      <p:grpSpPr>
+        <a:xfrm>
+          <a:off x="0" y="0"/>
+          <a:ext cx="0" cy="0"/>
+          <a:chOff x="0" y="0"/>
+          <a:chExt cx="0" cy="0"/>
+        </a:xfrm>
+      </p:grpSpPr>
+      <p:sp>
+        <p:nvSpPr>
+          <p:cNvPr id="2" name="Title 1">
+            <a:extLst>
+              <a:ext uri="{FF2B5EF4-FFF2-40B4-BE49-F238E27FC236}">
+                <a16:creationId xmlns:a16="http://schemas.microsoft.com/office/drawing/2014/main" id="{DEF267D6-2E50-9C27-60E9-67AD400B5064}"/>
+              </a:ext>
+            </a:extLst>
+          </p:cNvPr>
+          <p:cNvSpPr>
+            <a:spLocks noGrp="1"/>
+          </p:cNvSpPr>
+          <p:nvPr>
+            <p:ph type="title"/>
+          </p:nvPr>
+        </p:nvSpPr>
+        <p:spPr/>
+        <p:txBody>
+          <a:bodyPr/>
+          <a:lstStyle/>
+          <a:p>
+            <a:pPr algn="ctr"/>
+            <a:r>
+              <a:rPr lang="en-IN" dirty="0">
+                <a:latin typeface="Times New Roman" panose="02020603050405020304" pitchFamily="18" charset="0"/>
+                <a:cs typeface="Times New Roman" panose="02020603050405020304" pitchFamily="18" charset="0"/>
+              </a:rPr>
+              <a:t>Basic Programme</a:t>
+            </a:r>
+          </a:p>
+        </p:txBody>
+      </p:sp>
+      <p:sp>
+        <p:nvSpPr>
+          <p:cNvPr id="3" name="Content Placeholder 2">
+            <a:extLst>
+              <a:ext uri="{FF2B5EF4-FFF2-40B4-BE49-F238E27FC236}">
+                <a16:creationId xmlns:a16="http://schemas.microsoft.com/office/drawing/2014/main" id="{89DEB8F0-937E-69A5-7A1A-CEC12D0B0060}"/>
+              </a:ext>
+            </a:extLst>
+          </p:cNvPr>
+          <p:cNvSpPr>
+            <a:spLocks noGrp="1"/>
+          </p:cNvSpPr>
+          <p:nvPr>
+            <p:ph idx="1"/>
+          </p:nvPr>
+        </p:nvSpPr>
+        <p:spPr/>
+        <p:txBody>
+          <a:bodyPr>
+            <a:normAutofit fontScale="77500" lnSpcReduction="20000"/>
+          </a:bodyPr>
+          <a:lstStyle/>
+          <a:p>
+            <a:r>
+              <a:rPr lang="en-IN" dirty="0">
+                <a:latin typeface="Times New Roman" panose="02020603050405020304" pitchFamily="18" charset="0"/>
+                <a:cs typeface="Times New Roman" panose="02020603050405020304" pitchFamily="18" charset="0"/>
+              </a:rPr>
+              <a:t>The basic programme mostly uses the base services required to keep the connection from breaking from a client.</a:t>
+            </a:r>
+          </a:p>
+          <a:p>
+            <a:endParaRPr lang="en-IN" dirty="0">
+              <a:latin typeface="Times New Roman" panose="02020603050405020304" pitchFamily="18" charset="0"/>
+              <a:cs typeface="Times New Roman" panose="02020603050405020304" pitchFamily="18" charset="0"/>
+            </a:endParaRPr>
+          </a:p>
+          <a:p>
+            <a:r>
+              <a:rPr lang="en-IN" dirty="0">
+                <a:latin typeface="Times New Roman" panose="02020603050405020304" pitchFamily="18" charset="0"/>
+                <a:cs typeface="Times New Roman" panose="02020603050405020304" pitchFamily="18" charset="0"/>
+              </a:rPr>
+              <a:t>The other services are to either make the robot stand or sit and also take an image.</a:t>
+            </a:r>
+          </a:p>
+          <a:p>
+            <a:endParaRPr lang="en-IN" dirty="0">
+              <a:latin typeface="Times New Roman" panose="02020603050405020304" pitchFamily="18" charset="0"/>
+              <a:cs typeface="Times New Roman" panose="02020603050405020304" pitchFamily="18" charset="0"/>
+            </a:endParaRPr>
+          </a:p>
+          <a:p>
+            <a:r>
+              <a:rPr lang="en-IN" dirty="0">
+                <a:latin typeface="Times New Roman" panose="02020603050405020304" pitchFamily="18" charset="0"/>
+                <a:cs typeface="Times New Roman" panose="02020603050405020304" pitchFamily="18" charset="0"/>
+              </a:rPr>
+              <a:t>All of these services are called to perform a specific action that belongs to that service.  For e.g.  Taking or leaving the lease belongs to the lease service.</a:t>
+            </a:r>
+          </a:p>
+          <a:p>
+            <a:endParaRPr lang="en-IN" dirty="0">
+              <a:latin typeface="Times New Roman" panose="02020603050405020304" pitchFamily="18" charset="0"/>
+              <a:cs typeface="Times New Roman" panose="02020603050405020304" pitchFamily="18" charset="0"/>
+            </a:endParaRPr>
+          </a:p>
+          <a:p>
+            <a:r>
+              <a:rPr lang="en-IN" dirty="0">
+                <a:latin typeface="Times New Roman" panose="02020603050405020304" pitchFamily="18" charset="0"/>
+                <a:cs typeface="Times New Roman" panose="02020603050405020304" pitchFamily="18" charset="0"/>
+              </a:rPr>
+              <a:t>Most of the base actions performed in the programme are supported by the services. It ranges from estop to making the robot stand and sit.</a:t>
+            </a:r>
+          </a:p>
+          <a:p>
+            <a:endParaRPr lang="en-IN" dirty="0">
+              <a:latin typeface="Times New Roman" panose="02020603050405020304" pitchFamily="18" charset="0"/>
+              <a:cs typeface="Times New Roman" panose="02020603050405020304" pitchFamily="18" charset="0"/>
+            </a:endParaRPr>
+          </a:p>
+          <a:p>
+            <a:r>
+              <a:rPr lang="en-IN" dirty="0">
+                <a:latin typeface="Times New Roman" panose="02020603050405020304" pitchFamily="18" charset="0"/>
+                <a:cs typeface="Times New Roman" panose="02020603050405020304" pitchFamily="18" charset="0"/>
+              </a:rPr>
+              <a:t>For the display of image, the image capture is part of the service, although the code to display or save the image is only at the client end.</a:t>
+            </a:r>
+          </a:p>
+        </p:txBody>
+      </p:sp>
+      <p:sp>
+        <p:nvSpPr>
+          <p:cNvPr id="4" name="Date Placeholder 3">
+            <a:extLst>
+              <a:ext uri="{FF2B5EF4-FFF2-40B4-BE49-F238E27FC236}">
+                <a16:creationId xmlns:a16="http://schemas.microsoft.com/office/drawing/2014/main" id="{42B5D580-9028-99B4-E463-C0142B7E3ABC}"/>
+              </a:ext>
+            </a:extLst>
+          </p:cNvPr>
+          <p:cNvSpPr>
+            <a:spLocks noGrp="1"/>
+          </p:cNvSpPr>
+          <p:nvPr>
+            <p:ph type="dt" sz="half" idx="10"/>
+          </p:nvPr>
+        </p:nvSpPr>
+        <p:spPr/>
+        <p:txBody>
+          <a:bodyPr/>
+          <a:lstStyle/>
+          <a:p>
+            <a:r>
+              <a:rPr lang="en-US"/>
+              <a:t>05.06.2025</a:t>
+            </a:r>
+            <a:endParaRPr lang="de-DE"/>
+          </a:p>
+        </p:txBody>
+      </p:sp>
+      <p:sp>
+        <p:nvSpPr>
+          <p:cNvPr id="5" name="Footer Placeholder 4">
+            <a:extLst>
+              <a:ext uri="{FF2B5EF4-FFF2-40B4-BE49-F238E27FC236}">
+                <a16:creationId xmlns:a16="http://schemas.microsoft.com/office/drawing/2014/main" id="{856F1670-9E32-AB37-4942-3274BCC3D0D0}"/>
+              </a:ext>
+            </a:extLst>
+          </p:cNvPr>
+          <p:cNvSpPr>
+            <a:spLocks noGrp="1"/>
+          </p:cNvSpPr>
+          <p:nvPr>
+            <p:ph type="ftr" sz="quarter" idx="11"/>
+          </p:nvPr>
+        </p:nvSpPr>
+        <p:spPr/>
+        <p:txBody>
+          <a:bodyPr/>
+          <a:lstStyle/>
+          <a:p>
+            <a:r>
+              <a:rPr lang="en-IN" dirty="0"/>
+              <a:t>IDT projects | GDSPOT | </a:t>
+            </a:r>
+            <a:r>
+              <a:rPr lang="en-IN" dirty="0" err="1"/>
+              <a:t>SoSe</a:t>
+            </a:r>
+            <a:r>
+              <a:rPr lang="en-IN" dirty="0"/>
+              <a:t> 2025</a:t>
+            </a:r>
+            <a:endParaRPr lang="de-DE" dirty="0"/>
+          </a:p>
+        </p:txBody>
+      </p:sp>
+      <p:sp>
+        <p:nvSpPr>
+          <p:cNvPr id="6" name="Slide Number Placeholder 5">
+            <a:extLst>
+              <a:ext uri="{FF2B5EF4-FFF2-40B4-BE49-F238E27FC236}">
+                <a16:creationId xmlns:a16="http://schemas.microsoft.com/office/drawing/2014/main" id="{E0DDE311-F27F-F537-94EA-6E603010ADA5}"/>
+              </a:ext>
+            </a:extLst>
+          </p:cNvPr>
+          <p:cNvSpPr>
+            <a:spLocks noGrp="1"/>
+          </p:cNvSpPr>
+          <p:nvPr>
+            <p:ph type="sldNum" sz="quarter" idx="12"/>
+          </p:nvPr>
+        </p:nvSpPr>
+        <p:spPr/>
+        <p:txBody>
+          <a:bodyPr/>
+          <a:lstStyle/>
+          <a:p>
+            <a:fld id="{516988D0-1470-4690-BDE1-E3A50181EF78}" type="slidenum">
+              <a:rPr lang="de-DE" smtClean="0"/>
+              <a:t>8</a:t>
+            </a:fld>
+            <a:endParaRPr lang="de-DE" dirty="0"/>
+          </a:p>
+        </p:txBody>
+      </p:sp>
+    </p:spTree>
+    <p:extLst>
+      <p:ext uri="{BB962C8B-B14F-4D97-AF65-F5344CB8AC3E}">
+        <p14:creationId xmlns:p14="http://schemas.microsoft.com/office/powerpoint/2010/main" val="3777955462"/>
+      </p:ext>
+    </p:extLst>
+  </p:cSld>
+  <p:clrMapOvr>
+    <a:masterClrMapping/>
+  </p:clrMapOvr>
+</p:sld>
+</file>
+
+<file path=ppt/slides/slide9.xml><?xml version="1.0" encoding="utf-8"?>
+<p:sld xmlns:a="http://schemas.openxmlformats.org/drawingml/2006/main" xmlns:r="http://schemas.openxmlformats.org/officeDocument/2006/relationships" xmlns:p="http://schemas.openxmlformats.org/presentationml/2006/main">
+  <p:cSld>
+    <p:spTree>
+      <p:nvGrpSpPr>
+        <p:cNvPr id="1" name=""/>
+        <p:cNvGrpSpPr/>
+        <p:nvPr/>
+      </p:nvGrpSpPr>
+      <p:grpSpPr>
+        <a:xfrm>
+          <a:off x="0" y="0"/>
+          <a:ext cx="0" cy="0"/>
+          <a:chOff x="0" y="0"/>
+          <a:chExt cx="0" cy="0"/>
+        </a:xfrm>
+      </p:grpSpPr>
+      <p:sp>
+        <p:nvSpPr>
+          <p:cNvPr id="2" name="Title 1">
+            <a:extLst>
+              <a:ext uri="{FF2B5EF4-FFF2-40B4-BE49-F238E27FC236}">
+                <a16:creationId xmlns:a16="http://schemas.microsoft.com/office/drawing/2014/main" id="{7AC46FCE-F9C7-6EBA-A389-8EFFE9785899}"/>
+              </a:ext>
+            </a:extLst>
+          </p:cNvPr>
+          <p:cNvSpPr>
+            <a:spLocks noGrp="1"/>
+          </p:cNvSpPr>
+          <p:nvPr>
+            <p:ph type="title"/>
+          </p:nvPr>
+        </p:nvSpPr>
+        <p:spPr/>
+        <p:txBody>
+          <a:bodyPr/>
+          <a:lstStyle/>
+          <a:p>
+            <a:r>
+              <a:rPr lang="en-IN" dirty="0"/>
+              <a:t>Git </a:t>
+            </a:r>
+            <a:r>
+              <a:rPr lang="en-IN" dirty="0">
+                <a:latin typeface="Times New Roman" panose="02020603050405020304" pitchFamily="18" charset="0"/>
+                <a:cs typeface="Times New Roman" panose="02020603050405020304" pitchFamily="18" charset="0"/>
+              </a:rPr>
+              <a:t>repository</a:t>
+            </a:r>
+            <a:r>
+              <a:rPr lang="en-IN" dirty="0"/>
+              <a:t> link:</a:t>
+            </a:r>
+          </a:p>
+        </p:txBody>
+      </p:sp>
+      <p:sp>
+        <p:nvSpPr>
+          <p:cNvPr id="3" name="Content Placeholder 2">
+            <a:extLst>
+              <a:ext uri="{FF2B5EF4-FFF2-40B4-BE49-F238E27FC236}">
+                <a16:creationId xmlns:a16="http://schemas.microsoft.com/office/drawing/2014/main" id="{21089575-3086-3FC5-A09E-F496391BB820}"/>
+              </a:ext>
+            </a:extLst>
+          </p:cNvPr>
+          <p:cNvSpPr>
+            <a:spLocks noGrp="1"/>
+          </p:cNvSpPr>
+          <p:nvPr>
+            <p:ph idx="1"/>
+          </p:nvPr>
+        </p:nvSpPr>
+        <p:spPr/>
+        <p:txBody>
+          <a:bodyPr/>
+          <a:lstStyle/>
+          <a:p>
+            <a:r>
+              <a:rPr lang="en-IN" dirty="0">
+                <a:latin typeface="Times New Roman" panose="02020603050405020304" pitchFamily="18" charset="0"/>
+                <a:cs typeface="Times New Roman" panose="02020603050405020304" pitchFamily="18" charset="0"/>
+                <a:hlinkClick r:id="rId2"/>
+              </a:rPr>
+              <a:t>https://github.com/abhishekdilippatil/spot-sdk.git</a:t>
+            </a:r>
+            <a:endParaRPr lang="en-IN" dirty="0">
+              <a:latin typeface="Times New Roman" panose="02020603050405020304" pitchFamily="18" charset="0"/>
+              <a:cs typeface="Times New Roman" panose="02020603050405020304" pitchFamily="18" charset="0"/>
+            </a:endParaRPr>
+          </a:p>
+        </p:txBody>
+      </p:sp>
+      <p:sp>
+        <p:nvSpPr>
+          <p:cNvPr id="4" name="Date Placeholder 3">
+            <a:extLst>
+              <a:ext uri="{FF2B5EF4-FFF2-40B4-BE49-F238E27FC236}">
+                <a16:creationId xmlns:a16="http://schemas.microsoft.com/office/drawing/2014/main" id="{08B8AE87-AB29-4511-9939-306A476605B2}"/>
+              </a:ext>
+            </a:extLst>
+          </p:cNvPr>
+          <p:cNvSpPr>
+            <a:spLocks noGrp="1"/>
+          </p:cNvSpPr>
+          <p:nvPr>
+            <p:ph type="dt" sz="half" idx="10"/>
+          </p:nvPr>
+        </p:nvSpPr>
+        <p:spPr/>
+        <p:txBody>
+          <a:bodyPr/>
+          <a:lstStyle/>
+          <a:p>
+            <a:r>
+              <a:rPr lang="en-US"/>
+              <a:t>05.06.2025</a:t>
+            </a:r>
+            <a:endParaRPr lang="de-DE"/>
+          </a:p>
+        </p:txBody>
+      </p:sp>
+      <p:sp>
+        <p:nvSpPr>
+          <p:cNvPr id="5" name="Footer Placeholder 4">
+            <a:extLst>
+              <a:ext uri="{FF2B5EF4-FFF2-40B4-BE49-F238E27FC236}">
+                <a16:creationId xmlns:a16="http://schemas.microsoft.com/office/drawing/2014/main" id="{32F2723D-598D-397A-21C9-E4062196A04F}"/>
+              </a:ext>
+            </a:extLst>
+          </p:cNvPr>
+          <p:cNvSpPr>
+            <a:spLocks noGrp="1"/>
+          </p:cNvSpPr>
+          <p:nvPr>
+            <p:ph type="ftr" sz="quarter" idx="11"/>
+          </p:nvPr>
+        </p:nvSpPr>
+        <p:spPr/>
+        <p:txBody>
+          <a:bodyPr/>
+          <a:lstStyle/>
+          <a:p>
+            <a:r>
+              <a:rPr lang="en-IN"/>
+              <a:t>IDT projects | GDSPOT | SoSe 2025</a:t>
+            </a:r>
+            <a:endParaRPr lang="de-DE"/>
+          </a:p>
+        </p:txBody>
+      </p:sp>
+      <p:sp>
+        <p:nvSpPr>
+          <p:cNvPr id="6" name="Slide Number Placeholder 5">
+            <a:extLst>
+              <a:ext uri="{FF2B5EF4-FFF2-40B4-BE49-F238E27FC236}">
+                <a16:creationId xmlns:a16="http://schemas.microsoft.com/office/drawing/2014/main" id="{E84B2434-079F-4CFE-EFF5-2FDBC0D37C5F}"/>
+              </a:ext>
+            </a:extLst>
+          </p:cNvPr>
+          <p:cNvSpPr>
+            <a:spLocks noGrp="1"/>
+          </p:cNvSpPr>
+          <p:nvPr>
+            <p:ph type="sldNum" sz="quarter" idx="12"/>
+          </p:nvPr>
+        </p:nvSpPr>
+        <p:spPr/>
+        <p:txBody>
+          <a:bodyPr/>
+          <a:lstStyle/>
+          <a:p>
+            <a:fld id="{516988D0-1470-4690-BDE1-E3A50181EF78}" type="slidenum">
+              <a:rPr lang="de-DE" smtClean="0"/>
+              <a:t>9</a:t>
+            </a:fld>
+            <a:endParaRPr lang="de-DE"/>
+          </a:p>
+        </p:txBody>
+      </p:sp>
+    </p:spTree>
+    <p:extLst>
+      <p:ext uri="{BB962C8B-B14F-4D97-AF65-F5344CB8AC3E}">
+        <p14:creationId xmlns:p14="http://schemas.microsoft.com/office/powerpoint/2010/main" val="547047557"/>
       </p:ext>
     </p:extLst>
   </p:cSld>
